--- a/modulos/05-logica-etl-elt/sessao-ao-vivo-logica-etl-elt.pptx
+++ b/modulos/05-logica-etl-elt/sessao-ao-vivo-logica-etl-elt.pptx
@@ -2,27 +2,27 @@
 <file path=ppt/presentation.xml><?xml version="1.0" encoding="utf-8"?>
 <p:presentation xmlns:p="http://schemas.openxmlformats.org/presentationml/2006/main">
   <p:sldMasterIdLst>
-    <p:sldMasterId xmlns:r="http://schemas.openxmlformats.org/officeDocument/2006/relationships" id="2147483648" r:id="R04bbcb785a28426f"/>
+    <p:sldMasterId xmlns:r="http://schemas.openxmlformats.org/officeDocument/2006/relationships" id="2147483648" r:id="R2e6a0bc933294faa"/>
   </p:sldMasterIdLst>
   <p:notesMasterIdLst>
-    <p:notesMasterId xmlns:r="http://schemas.openxmlformats.org/officeDocument/2006/relationships" r:id="R7b9769350ffc4746"/>
+    <p:notesMasterId xmlns:r="http://schemas.openxmlformats.org/officeDocument/2006/relationships" r:id="R7fadac3e2ea34299"/>
   </p:notesMasterIdLst>
   <p:sldIdLst>
-    <p:sldId xmlns:r="http://schemas.openxmlformats.org/officeDocument/2006/relationships" id="256" r:id="Rc01fd234541b4df5"/>
-    <p:sldId xmlns:r="http://schemas.openxmlformats.org/officeDocument/2006/relationships" id="257" r:id="R54edcb1b6fc5445f"/>
-    <p:sldId xmlns:r="http://schemas.openxmlformats.org/officeDocument/2006/relationships" id="258" r:id="Rbab5e53b7a644170"/>
-    <p:sldId xmlns:r="http://schemas.openxmlformats.org/officeDocument/2006/relationships" id="259" r:id="Racae16b7a2224536"/>
-    <p:sldId xmlns:r="http://schemas.openxmlformats.org/officeDocument/2006/relationships" id="260" r:id="R685498eb01944bca"/>
-    <p:sldId xmlns:r="http://schemas.openxmlformats.org/officeDocument/2006/relationships" id="261" r:id="R1a349eabb31f4df7"/>
-    <p:sldId xmlns:r="http://schemas.openxmlformats.org/officeDocument/2006/relationships" id="262" r:id="R90eb01e358d84166"/>
-    <p:sldId xmlns:r="http://schemas.openxmlformats.org/officeDocument/2006/relationships" id="263" r:id="Rc82d89b384c24901"/>
-    <p:sldId xmlns:r="http://schemas.openxmlformats.org/officeDocument/2006/relationships" id="264" r:id="Rd8afad7064dc4305"/>
-    <p:sldId xmlns:r="http://schemas.openxmlformats.org/officeDocument/2006/relationships" id="265" r:id="Re3f0ad53205d4430"/>
-    <p:sldId xmlns:r="http://schemas.openxmlformats.org/officeDocument/2006/relationships" id="266" r:id="Ra66dfa0bfd62405a"/>
-    <p:sldId xmlns:r="http://schemas.openxmlformats.org/officeDocument/2006/relationships" id="267" r:id="R0006f749d4b2410f"/>
-    <p:sldId xmlns:r="http://schemas.openxmlformats.org/officeDocument/2006/relationships" id="268" r:id="R618464bd590243e1"/>
-    <p:sldId xmlns:r="http://schemas.openxmlformats.org/officeDocument/2006/relationships" id="269" r:id="Ra6fd9df5eb9a4c70"/>
-    <p:sldId xmlns:r="http://schemas.openxmlformats.org/officeDocument/2006/relationships" id="270" r:id="R9616385c9d4e4a28"/>
+    <p:sldId xmlns:r="http://schemas.openxmlformats.org/officeDocument/2006/relationships" id="256" r:id="R077292e2b01e43b4"/>
+    <p:sldId xmlns:r="http://schemas.openxmlformats.org/officeDocument/2006/relationships" id="257" r:id="R2510e50a367b4a1f"/>
+    <p:sldId xmlns:r="http://schemas.openxmlformats.org/officeDocument/2006/relationships" id="258" r:id="R5db2978386ca45e5"/>
+    <p:sldId xmlns:r="http://schemas.openxmlformats.org/officeDocument/2006/relationships" id="259" r:id="Rda7c4744d3c6468c"/>
+    <p:sldId xmlns:r="http://schemas.openxmlformats.org/officeDocument/2006/relationships" id="260" r:id="Rffc7beb6bd514f79"/>
+    <p:sldId xmlns:r="http://schemas.openxmlformats.org/officeDocument/2006/relationships" id="261" r:id="Re8e643546557432e"/>
+    <p:sldId xmlns:r="http://schemas.openxmlformats.org/officeDocument/2006/relationships" id="262" r:id="Re7b14f7998fd4b3a"/>
+    <p:sldId xmlns:r="http://schemas.openxmlformats.org/officeDocument/2006/relationships" id="263" r:id="R3837d3bbb9f14d65"/>
+    <p:sldId xmlns:r="http://schemas.openxmlformats.org/officeDocument/2006/relationships" id="264" r:id="R3b4646e8d9e44cfb"/>
+    <p:sldId xmlns:r="http://schemas.openxmlformats.org/officeDocument/2006/relationships" id="265" r:id="R63670a490a5546fb"/>
+    <p:sldId xmlns:r="http://schemas.openxmlformats.org/officeDocument/2006/relationships" id="266" r:id="R6f7b358fa65f415a"/>
+    <p:sldId xmlns:r="http://schemas.openxmlformats.org/officeDocument/2006/relationships" id="267" r:id="R470a9ac0fe0343b0"/>
+    <p:sldId xmlns:r="http://schemas.openxmlformats.org/officeDocument/2006/relationships" id="268" r:id="Rf51c2ac5a5f6428d"/>
+    <p:sldId xmlns:r="http://schemas.openxmlformats.org/officeDocument/2006/relationships" id="269" r:id="R31e3ec36d66542f0"/>
+    <p:sldId xmlns:r="http://schemas.openxmlformats.org/officeDocument/2006/relationships" id="270" r:id="Rfbb761fd62e14678"/>
   </p:sldIdLst>
   <p:sldSz cx="12192000" cy="6858000"/>
   <p:notesSz cx="6858000" cy="9144000"/>
@@ -1493,7 +1493,7 @@
   </p:cSld>
   <p:clrMap bg1="lt1" tx1="dk1" bg2="lt2" tx2="dk2" accent1="accent1" accent2="accent2" accent3="accent3" accent4="accent4" accent5="accent5" accent6="accent6" hlink="hlink" folHlink="folHlink"/>
   <p:sldLayoutIdLst>
-    <p:sldLayoutId xmlns:r="http://schemas.openxmlformats.org/officeDocument/2006/relationships" id="2147483649" r:id="R1d786098bba24eaf"/>
+    <p:sldLayoutId xmlns:r="http://schemas.openxmlformats.org/officeDocument/2006/relationships" id="2147483649" r:id="R554a34d3f6a14483"/>
   </p:sldLayoutIdLst>
   <p:txStyles>
     <p:titleStyle>
@@ -1781,7 +1781,7 @@
     <p:bg>
       <p:bgPr>
         <a:solidFill xmlns:a="http://schemas.openxmlformats.org/drawingml/2006/main">
-          <a:srgbClr val="0E1B3E"/>
+          <a:srgbClr val="070F26"/>
         </a:solidFill>
       </p:bgPr>
     </p:bg>
@@ -1799,7 +1799,7 @@
           <p:cNvPr id="1" name="">
             <a:extLst xmlns:a="http://schemas.openxmlformats.org/drawingml/2006/main">
               <a:ext uri="{FF2B5EF4-FFF2-40B4-BE49-F238E27FC236}">
-                <a16:creationId xmlns:a16="http://schemas.microsoft.com/office/drawing/2014/main" id="{CD01DF5D-DF44-4CD0-938F-0ACE2FFB7A59}"/>
+                <a16:creationId xmlns:a16="http://schemas.microsoft.com/office/drawing/2014/main" id="{1B0DD41C-89CA-4869-9A9B-311E2B02F43C}"/>
               </a:ext>
             </a:extLst>
           </p:cNvPr>
@@ -1817,7 +1817,7 @@
             <a:avLst/>
           </a:prstGeom>
           <a:solidFill xmlns:a="http://schemas.openxmlformats.org/drawingml/2006/main">
-            <a:srgbClr val="0E1B3E"/>
+            <a:srgbClr val="070F26"/>
           </a:solidFill>
           <a:ln xmlns:a="http://schemas.openxmlformats.org/drawingml/2006/main" w="0">
             <a:solidFill>
@@ -1838,7 +1838,7 @@
           <p:nvPr/>
         </p:nvPicPr>
         <p:blipFill>
-          <a:blip xmlns:r="http://schemas.openxmlformats.org/officeDocument/2006/relationships" xmlns:a="http://schemas.openxmlformats.org/drawingml/2006/main" r:embed="Rd44a21deeb32448c"/>
+          <a:blip xmlns:r="http://schemas.openxmlformats.org/officeDocument/2006/relationships" xmlns:a="http://schemas.openxmlformats.org/drawingml/2006/main" r:embed="R9d62238660e646ca"/>
           <a:stretch xmlns:a="http://schemas.openxmlformats.org/drawingml/2006/main"/>
         </p:blipFill>
         <p:spPr>
@@ -1856,7 +1856,7 @@
           <p:cNvPr id="3" name="">
             <a:extLst xmlns:a="http://schemas.openxmlformats.org/drawingml/2006/main">
               <a:ext uri="{FF2B5EF4-FFF2-40B4-BE49-F238E27FC236}">
-                <a16:creationId xmlns:a16="http://schemas.microsoft.com/office/drawing/2014/main" id="{D347D5F3-9EAE-4430-A3F2-BF78387AF0CA}"/>
+                <a16:creationId xmlns:a16="http://schemas.microsoft.com/office/drawing/2014/main" id="{D39272F1-0318-4157-B1B4-BA26F02E2F52}"/>
               </a:ext>
             </a:extLst>
           </p:cNvPr>
@@ -1914,7 +1914,7 @@
           <p:cNvPr id="4" name="">
             <a:extLst xmlns:a="http://schemas.openxmlformats.org/drawingml/2006/main">
               <a:ext uri="{FF2B5EF4-FFF2-40B4-BE49-F238E27FC236}">
-                <a16:creationId xmlns:a16="http://schemas.microsoft.com/office/drawing/2014/main" id="{CB8A4B17-0936-4B06-A581-3BA7751110D1}"/>
+                <a16:creationId xmlns:a16="http://schemas.microsoft.com/office/drawing/2014/main" id="{20800020-ADA1-4E24-B20E-DAD8935DC45B}"/>
               </a:ext>
             </a:extLst>
           </p:cNvPr>
@@ -1972,7 +1972,7 @@
           <p:cNvPr id="5" name="">
             <a:extLst xmlns:a="http://schemas.openxmlformats.org/drawingml/2006/main">
               <a:ext uri="{FF2B5EF4-FFF2-40B4-BE49-F238E27FC236}">
-                <a16:creationId xmlns:a16="http://schemas.microsoft.com/office/drawing/2014/main" id="{58A943A5-A528-4ECB-A241-DEA65CD384E1}"/>
+                <a16:creationId xmlns:a16="http://schemas.microsoft.com/office/drawing/2014/main" id="{2CB26FE2-72DB-48D6-8C60-CC6B158A8151}"/>
               </a:ext>
             </a:extLst>
           </p:cNvPr>
@@ -2034,7 +2034,7 @@
           <p:nvPr/>
         </p:nvPicPr>
         <p:blipFill>
-          <a:blip xmlns:r="http://schemas.openxmlformats.org/officeDocument/2006/relationships" xmlns:a="http://schemas.openxmlformats.org/drawingml/2006/main" r:embed="R4a363c9796fb41d2"/>
+          <a:blip xmlns:r="http://schemas.openxmlformats.org/officeDocument/2006/relationships" xmlns:a="http://schemas.openxmlformats.org/drawingml/2006/main" r:embed="R1c70f745c1cc4f4a"/>
           <a:stretch xmlns:a="http://schemas.openxmlformats.org/drawingml/2006/main"/>
         </p:blipFill>
         <p:spPr>
@@ -2052,7 +2052,7 @@
           <p:cNvPr id="7" name="">
             <a:extLst xmlns:a="http://schemas.openxmlformats.org/drawingml/2006/main">
               <a:ext uri="{FF2B5EF4-FFF2-40B4-BE49-F238E27FC236}">
-                <a16:creationId xmlns:a16="http://schemas.microsoft.com/office/drawing/2014/main" id="{A60D3F79-E81E-4546-911D-C91406920BAA}"/>
+                <a16:creationId xmlns:a16="http://schemas.microsoft.com/office/drawing/2014/main" id="{3B7A1B53-A7D8-407C-8F14-EE58E5519412}"/>
               </a:ext>
             </a:extLst>
           </p:cNvPr>
@@ -2110,7 +2110,7 @@
           <p:cNvPr id="8" name="">
             <a:extLst xmlns:a="http://schemas.openxmlformats.org/drawingml/2006/main">
               <a:ext uri="{FF2B5EF4-FFF2-40B4-BE49-F238E27FC236}">
-                <a16:creationId xmlns:a16="http://schemas.microsoft.com/office/drawing/2014/main" id="{B16464D4-563B-4F3C-8CAA-177EA78D0986}"/>
+                <a16:creationId xmlns:a16="http://schemas.microsoft.com/office/drawing/2014/main" id="{B615B673-0488-4EB4-A41E-05A503B34DE2}"/>
               </a:ext>
             </a:extLst>
           </p:cNvPr>
@@ -2168,7 +2168,7 @@
           <p:cNvPr id="9" name="">
             <a:extLst xmlns:a="http://schemas.openxmlformats.org/drawingml/2006/main">
               <a:ext uri="{FF2B5EF4-FFF2-40B4-BE49-F238E27FC236}">
-                <a16:creationId xmlns:a16="http://schemas.microsoft.com/office/drawing/2014/main" id="{3B12FC6B-A0A8-42D2-B054-DCFDC8343D55}"/>
+                <a16:creationId xmlns:a16="http://schemas.microsoft.com/office/drawing/2014/main" id="{BD69C92B-860A-4034-9A71-DCF898A4A04D}"/>
               </a:ext>
             </a:extLst>
           </p:cNvPr>
@@ -2226,7 +2226,7 @@
           <p:cNvPr id="10" name="">
             <a:extLst xmlns:a="http://schemas.openxmlformats.org/drawingml/2006/main">
               <a:ext uri="{FF2B5EF4-FFF2-40B4-BE49-F238E27FC236}">
-                <a16:creationId xmlns:a16="http://schemas.microsoft.com/office/drawing/2014/main" id="{ECDD3DED-34C8-47A9-9AB2-6BEA9C46C96B}"/>
+                <a16:creationId xmlns:a16="http://schemas.microsoft.com/office/drawing/2014/main" id="{676F445C-1B65-40A8-907F-EBDA78D8A82A}"/>
               </a:ext>
             </a:extLst>
           </p:cNvPr>
@@ -2261,7 +2261,7 @@
           <p:cNvPr id="11" name="">
             <a:extLst xmlns:a="http://schemas.openxmlformats.org/drawingml/2006/main">
               <a:ext uri="{FF2B5EF4-FFF2-40B4-BE49-F238E27FC236}">
-                <a16:creationId xmlns:a16="http://schemas.microsoft.com/office/drawing/2014/main" id="{443999AD-069E-499F-8B4E-318B2F2031E4}"/>
+                <a16:creationId xmlns:a16="http://schemas.microsoft.com/office/drawing/2014/main" id="{B5081AC5-58EB-401A-B198-E4B44E37A873}"/>
               </a:ext>
             </a:extLst>
           </p:cNvPr>
@@ -2317,7 +2317,7 @@
     </p:spTree>
     <p:extLst>
       <p:ext uri="{BB962C8B-B14F-4D97-AF65-F5344CB8AC3E}">
-        <p14:creationId xmlns:p14="http://schemas.microsoft.com/office/powerpoint/2010/main" val="79815319"/>
+        <p14:creationId xmlns:p14="http://schemas.microsoft.com/office/powerpoint/2010/main" val="3601790"/>
       </p:ext>
     </p:extLst>
   </p:cSld>
@@ -2348,7 +2348,7 @@
           <p:cNvPr id="1" name="">
             <a:extLst xmlns:a="http://schemas.openxmlformats.org/drawingml/2006/main">
               <a:ext uri="{FF2B5EF4-FFF2-40B4-BE49-F238E27FC236}">
-                <a16:creationId xmlns:a16="http://schemas.microsoft.com/office/drawing/2014/main" id="{8AA7975F-F6EC-4FC4-9327-562A3C42A06E}"/>
+                <a16:creationId xmlns:a16="http://schemas.microsoft.com/office/drawing/2014/main" id="{63E6FA2E-43B7-43C8-9C66-B860CB764AE5}"/>
               </a:ext>
             </a:extLst>
           </p:cNvPr>
@@ -2387,7 +2387,7 @@
           <p:nvPr/>
         </p:nvPicPr>
         <p:blipFill>
-          <a:blip xmlns:r="http://schemas.openxmlformats.org/officeDocument/2006/relationships" xmlns:a="http://schemas.openxmlformats.org/drawingml/2006/main" r:embed="Rd368d9ce473540b2"/>
+          <a:blip xmlns:r="http://schemas.openxmlformats.org/officeDocument/2006/relationships" xmlns:a="http://schemas.openxmlformats.org/drawingml/2006/main" r:embed="R34603ec3817a44b1"/>
           <a:stretch xmlns:a="http://schemas.openxmlformats.org/drawingml/2006/main"/>
         </p:blipFill>
         <p:spPr>
@@ -2405,7 +2405,7 @@
           <p:cNvPr id="3" name="">
             <a:extLst xmlns:a="http://schemas.openxmlformats.org/drawingml/2006/main">
               <a:ext uri="{FF2B5EF4-FFF2-40B4-BE49-F238E27FC236}">
-                <a16:creationId xmlns:a16="http://schemas.microsoft.com/office/drawing/2014/main" id="{A767EB4B-135E-4B29-910C-39B4E0CE8980}"/>
+                <a16:creationId xmlns:a16="http://schemas.microsoft.com/office/drawing/2014/main" id="{6DFF8500-E138-4ABD-B19D-3FFB77F2DCB8}"/>
               </a:ext>
             </a:extLst>
           </p:cNvPr>
@@ -2443,14 +2443,14 @@
             <a:pPr algn="r">
               <a:defRPr sz="825" b="1">
                 <a:solidFill>
-                  <a:srgbClr val="0E1B3E"/>
+                  <a:srgbClr val="070F26"/>
                 </a:solidFill>
               </a:defRPr>
             </a:pPr>
             <a:r>
               <a:rPr sz="825" b="1">
                 <a:solidFill>
-                  <a:srgbClr val="0E1B3E"/>
+                  <a:srgbClr val="070F26"/>
                 </a:solidFill>
               </a:rPr>
               <a:t>NTT DATA UNIVERSITY</a:t>
@@ -2463,7 +2463,7 @@
           <p:cNvPr id="4" name="">
             <a:extLst xmlns:a="http://schemas.openxmlformats.org/drawingml/2006/main">
               <a:ext uri="{FF2B5EF4-FFF2-40B4-BE49-F238E27FC236}">
-                <a16:creationId xmlns:a16="http://schemas.microsoft.com/office/drawing/2014/main" id="{8571691A-0364-40A7-8BAC-B9CE06D11DA9}"/>
+                <a16:creationId xmlns:a16="http://schemas.microsoft.com/office/drawing/2014/main" id="{7E038878-D445-42EF-AE3E-3184D80A231A}"/>
               </a:ext>
             </a:extLst>
           </p:cNvPr>
@@ -2521,7 +2521,7 @@
           <p:cNvPr id="5" name="">
             <a:extLst xmlns:a="http://schemas.openxmlformats.org/drawingml/2006/main">
               <a:ext uri="{FF2B5EF4-FFF2-40B4-BE49-F238E27FC236}">
-                <a16:creationId xmlns:a16="http://schemas.microsoft.com/office/drawing/2014/main" id="{F7D9C0C0-578C-4989-A71E-2F3789194635}"/>
+                <a16:creationId xmlns:a16="http://schemas.microsoft.com/office/drawing/2014/main" id="{9A7D0FE6-061C-4BCA-B72F-67F591E871A0}"/>
               </a:ext>
             </a:extLst>
           </p:cNvPr>
@@ -2579,7 +2579,7 @@
           <p:cNvPr id="6" name="">
             <a:extLst xmlns:a="http://schemas.openxmlformats.org/drawingml/2006/main">
               <a:ext uri="{FF2B5EF4-FFF2-40B4-BE49-F238E27FC236}">
-                <a16:creationId xmlns:a16="http://schemas.microsoft.com/office/drawing/2014/main" id="{CFDF8A80-E2D3-411B-A5DE-B85BEA3BF312}"/>
+                <a16:creationId xmlns:a16="http://schemas.microsoft.com/office/drawing/2014/main" id="{79EBBEA8-933B-4399-8314-B131EC0FFD5F}"/>
               </a:ext>
             </a:extLst>
           </p:cNvPr>
@@ -2617,14 +2617,14 @@
             <a:pPr algn="r">
               <a:defRPr sz="675" b="1">
                 <a:solidFill>
-                  <a:srgbClr val="0E1B3E"/>
+                  <a:srgbClr val="070F26"/>
                 </a:solidFill>
               </a:defRPr>
             </a:pPr>
             <a:r>
               <a:rPr sz="675" b="1">
                 <a:solidFill>
-                  <a:srgbClr val="0E1B3E"/>
+                  <a:srgbClr val="070F26"/>
                 </a:solidFill>
               </a:rPr>
               <a:t>NTT DATA UNIVERSITY</a:t>
@@ -2637,7 +2637,7 @@
           <p:cNvPr id="7" name="">
             <a:extLst xmlns:a="http://schemas.openxmlformats.org/drawingml/2006/main">
               <a:ext uri="{FF2B5EF4-FFF2-40B4-BE49-F238E27FC236}">
-                <a16:creationId xmlns:a16="http://schemas.microsoft.com/office/drawing/2014/main" id="{60DC4AF9-60D7-4578-A9D5-1C8052482CCC}"/>
+                <a16:creationId xmlns:a16="http://schemas.microsoft.com/office/drawing/2014/main" id="{08D4A5A3-A7EA-4924-B5A8-D36E220CE607}"/>
               </a:ext>
             </a:extLst>
           </p:cNvPr>
@@ -2695,7 +2695,7 @@
           <p:cNvPr id="8" name="">
             <a:extLst xmlns:a="http://schemas.openxmlformats.org/drawingml/2006/main">
               <a:ext uri="{FF2B5EF4-FFF2-40B4-BE49-F238E27FC236}">
-                <a16:creationId xmlns:a16="http://schemas.microsoft.com/office/drawing/2014/main" id="{2795272D-5BDA-4453-871F-023EF437875A}"/>
+                <a16:creationId xmlns:a16="http://schemas.microsoft.com/office/drawing/2014/main" id="{A65C10D1-CD78-430E-934C-14B9675B16B8}"/>
               </a:ext>
             </a:extLst>
           </p:cNvPr>
@@ -2733,14 +2733,14 @@
             <a:pPr algn="l">
               <a:defRPr sz="2400" b="0">
                 <a:solidFill>
-                  <a:srgbClr val="0E1B3E"/>
+                  <a:srgbClr val="070F26"/>
                 </a:solidFill>
               </a:defRPr>
             </a:pPr>
             <a:r>
               <a:rPr sz="2400" b="0">
                 <a:solidFill>
-                  <a:srgbClr val="0E1B3E"/>
+                  <a:srgbClr val="070F26"/>
                 </a:solidFill>
               </a:rPr>
               <a:t>Alerta de qualidade — Ex 5.4 final</a:t>
@@ -2753,7 +2753,7 @@
           <p:cNvPr id="9" name="">
             <a:extLst xmlns:a="http://schemas.openxmlformats.org/drawingml/2006/main">
               <a:ext uri="{FF2B5EF4-FFF2-40B4-BE49-F238E27FC236}">
-                <a16:creationId xmlns:a16="http://schemas.microsoft.com/office/drawing/2014/main" id="{05D8A9D8-BB13-4874-8E16-A0AC0007591A}"/>
+                <a16:creationId xmlns:a16="http://schemas.microsoft.com/office/drawing/2014/main" id="{ECBDE82E-0AF3-4CAA-B4B7-DEC28593B24A}"/>
               </a:ext>
             </a:extLst>
           </p:cNvPr>
@@ -2811,7 +2811,7 @@
           <p:cNvPr id="10" name="">
             <a:extLst xmlns:a="http://schemas.openxmlformats.org/drawingml/2006/main">
               <a:ext uri="{FF2B5EF4-FFF2-40B4-BE49-F238E27FC236}">
-                <a16:creationId xmlns:a16="http://schemas.microsoft.com/office/drawing/2014/main" id="{5E8AB5D0-59ED-4476-A58A-91FE8C8F6AC3}"/>
+                <a16:creationId xmlns:a16="http://schemas.microsoft.com/office/drawing/2014/main" id="{96EF2FE9-1B95-4443-AFF4-4F578835F0D9}"/>
               </a:ext>
             </a:extLst>
           </p:cNvPr>
@@ -2844,7 +2844,7 @@
           <p:cNvPr id="11" name="">
             <a:extLst xmlns:a="http://schemas.openxmlformats.org/drawingml/2006/main">
               <a:ext uri="{FF2B5EF4-FFF2-40B4-BE49-F238E27FC236}">
-                <a16:creationId xmlns:a16="http://schemas.microsoft.com/office/drawing/2014/main" id="{5A789DDC-9C38-45A8-891A-67B488D4025E}"/>
+                <a16:creationId xmlns:a16="http://schemas.microsoft.com/office/drawing/2014/main" id="{0E6976C9-B298-41F8-AC96-D55F96F82734}"/>
               </a:ext>
             </a:extLst>
           </p:cNvPr>
@@ -2879,7 +2879,7 @@
           <p:cNvPr id="12" name="">
             <a:extLst xmlns:a="http://schemas.openxmlformats.org/drawingml/2006/main">
               <a:ext uri="{FF2B5EF4-FFF2-40B4-BE49-F238E27FC236}">
-                <a16:creationId xmlns:a16="http://schemas.microsoft.com/office/drawing/2014/main" id="{92BEACC2-CF9E-4112-99E2-4E3E37C12CBB}"/>
+                <a16:creationId xmlns:a16="http://schemas.microsoft.com/office/drawing/2014/main" id="{0636271E-F3E7-4E5B-8701-E23D95427723}"/>
               </a:ext>
             </a:extLst>
           </p:cNvPr>
@@ -2937,7 +2937,7 @@
           <p:cNvPr id="13" name="">
             <a:extLst xmlns:a="http://schemas.openxmlformats.org/drawingml/2006/main">
               <a:ext uri="{FF2B5EF4-FFF2-40B4-BE49-F238E27FC236}">
-                <a16:creationId xmlns:a16="http://schemas.microsoft.com/office/drawing/2014/main" id="{D85B6AF5-8C95-4BA6-97C2-FC73552E135F}"/>
+                <a16:creationId xmlns:a16="http://schemas.microsoft.com/office/drawing/2014/main" id="{918B8F2A-A43E-43CF-A004-6DFD9802CC30}"/>
               </a:ext>
             </a:extLst>
           </p:cNvPr>
@@ -3046,7 +3046,7 @@
           <p:cNvPr id="14" name="">
             <a:extLst xmlns:a="http://schemas.openxmlformats.org/drawingml/2006/main">
               <a:ext uri="{FF2B5EF4-FFF2-40B4-BE49-F238E27FC236}">
-                <a16:creationId xmlns:a16="http://schemas.microsoft.com/office/drawing/2014/main" id="{5A6814D9-8122-4F40-BAA6-E036DB019738}"/>
+                <a16:creationId xmlns:a16="http://schemas.microsoft.com/office/drawing/2014/main" id="{C885E4F2-4FAD-4C47-9BDB-586854792248}"/>
               </a:ext>
             </a:extLst>
           </p:cNvPr>
@@ -3079,7 +3079,7 @@
           <p:cNvPr id="15" name="">
             <a:extLst xmlns:a="http://schemas.openxmlformats.org/drawingml/2006/main">
               <a:ext uri="{FF2B5EF4-FFF2-40B4-BE49-F238E27FC236}">
-                <a16:creationId xmlns:a16="http://schemas.microsoft.com/office/drawing/2014/main" id="{1A9CFB61-5818-4C52-B6A3-32278EA9791E}"/>
+                <a16:creationId xmlns:a16="http://schemas.microsoft.com/office/drawing/2014/main" id="{AE84FB47-C371-4E22-8557-E461BA999385}"/>
               </a:ext>
             </a:extLst>
           </p:cNvPr>
@@ -3114,7 +3114,7 @@
           <p:cNvPr id="16" name="">
             <a:extLst xmlns:a="http://schemas.openxmlformats.org/drawingml/2006/main">
               <a:ext uri="{FF2B5EF4-FFF2-40B4-BE49-F238E27FC236}">
-                <a16:creationId xmlns:a16="http://schemas.microsoft.com/office/drawing/2014/main" id="{06548227-9177-4ECC-AC3A-50D50D950C5A}"/>
+                <a16:creationId xmlns:a16="http://schemas.microsoft.com/office/drawing/2014/main" id="{27F737AB-82A7-4F1B-917B-A15A8689D8D1}"/>
               </a:ext>
             </a:extLst>
           </p:cNvPr>
@@ -3172,7 +3172,7 @@
           <p:cNvPr id="17" name="">
             <a:extLst xmlns:a="http://schemas.openxmlformats.org/drawingml/2006/main">
               <a:ext uri="{FF2B5EF4-FFF2-40B4-BE49-F238E27FC236}">
-                <a16:creationId xmlns:a16="http://schemas.microsoft.com/office/drawing/2014/main" id="{3DB9FD63-DAFF-4B1C-9698-315D2DF8028C}"/>
+                <a16:creationId xmlns:a16="http://schemas.microsoft.com/office/drawing/2014/main" id="{135467AF-066C-477F-ACE9-53809B0A757E}"/>
               </a:ext>
             </a:extLst>
           </p:cNvPr>
@@ -3264,7 +3264,7 @@
           <p:cNvPr id="18" name="">
             <a:extLst xmlns:a="http://schemas.openxmlformats.org/drawingml/2006/main">
               <a:ext uri="{FF2B5EF4-FFF2-40B4-BE49-F238E27FC236}">
-                <a16:creationId xmlns:a16="http://schemas.microsoft.com/office/drawing/2014/main" id="{A93DBE03-0D8B-43D9-8B27-44BEB49600F5}"/>
+                <a16:creationId xmlns:a16="http://schemas.microsoft.com/office/drawing/2014/main" id="{6404B334-D35A-4357-8ECC-019B9253BD9E}"/>
               </a:ext>
             </a:extLst>
           </p:cNvPr>
@@ -3297,7 +3297,7 @@
           <p:cNvPr id="19" name="">
             <a:extLst xmlns:a="http://schemas.openxmlformats.org/drawingml/2006/main">
               <a:ext uri="{FF2B5EF4-FFF2-40B4-BE49-F238E27FC236}">
-                <a16:creationId xmlns:a16="http://schemas.microsoft.com/office/drawing/2014/main" id="{50CA9DB2-01B0-478F-B9F1-881A312CE7C3}"/>
+                <a16:creationId xmlns:a16="http://schemas.microsoft.com/office/drawing/2014/main" id="{48DF8E14-E463-4967-AA59-6A2862A985DD}"/>
               </a:ext>
             </a:extLst>
           </p:cNvPr>
@@ -3332,7 +3332,7 @@
           <p:cNvPr id="20" name="">
             <a:extLst xmlns:a="http://schemas.openxmlformats.org/drawingml/2006/main">
               <a:ext uri="{FF2B5EF4-FFF2-40B4-BE49-F238E27FC236}">
-                <a16:creationId xmlns:a16="http://schemas.microsoft.com/office/drawing/2014/main" id="{3BADCE0B-E259-4A61-BDBC-BE7E87752367}"/>
+                <a16:creationId xmlns:a16="http://schemas.microsoft.com/office/drawing/2014/main" id="{5D2A1DFF-CECD-4D0C-8FF3-9852AA99B038}"/>
               </a:ext>
             </a:extLst>
           </p:cNvPr>
@@ -3390,7 +3390,7 @@
           <p:cNvPr id="21" name="">
             <a:extLst xmlns:a="http://schemas.openxmlformats.org/drawingml/2006/main">
               <a:ext uri="{FF2B5EF4-FFF2-40B4-BE49-F238E27FC236}">
-                <a16:creationId xmlns:a16="http://schemas.microsoft.com/office/drawing/2014/main" id="{C5CF30E1-300A-49A4-8DB7-D82451D00AD4}"/>
+                <a16:creationId xmlns:a16="http://schemas.microsoft.com/office/drawing/2014/main" id="{10AF2330-B26D-4B82-AA36-69E183D46079}"/>
               </a:ext>
             </a:extLst>
           </p:cNvPr>
@@ -3480,7 +3480,7 @@
     </p:spTree>
     <p:extLst>
       <p:ext uri="{BB962C8B-B14F-4D97-AF65-F5344CB8AC3E}">
-        <p14:creationId xmlns:p14="http://schemas.microsoft.com/office/powerpoint/2010/main" val="1588631833"/>
+        <p14:creationId xmlns:p14="http://schemas.microsoft.com/office/powerpoint/2010/main" val="94244686"/>
       </p:ext>
     </p:extLst>
   </p:cSld>
@@ -3493,7 +3493,7 @@
     <p:bg>
       <p:bgPr>
         <a:solidFill xmlns:a="http://schemas.openxmlformats.org/drawingml/2006/main">
-          <a:srgbClr val="0E1B3E"/>
+          <a:srgbClr val="070F26"/>
         </a:solidFill>
       </p:bgPr>
     </p:bg>
@@ -3511,7 +3511,7 @@
           <p:cNvPr id="1" name="">
             <a:extLst xmlns:a="http://schemas.openxmlformats.org/drawingml/2006/main">
               <a:ext uri="{FF2B5EF4-FFF2-40B4-BE49-F238E27FC236}">
-                <a16:creationId xmlns:a16="http://schemas.microsoft.com/office/drawing/2014/main" id="{D4139258-5BE1-433D-943E-4205A5B76BCB}"/>
+                <a16:creationId xmlns:a16="http://schemas.microsoft.com/office/drawing/2014/main" id="{536537E4-DE15-4D3E-8615-015A65AC8EA6}"/>
               </a:ext>
             </a:extLst>
           </p:cNvPr>
@@ -3529,7 +3529,7 @@
             <a:avLst/>
           </a:prstGeom>
           <a:solidFill xmlns:a="http://schemas.openxmlformats.org/drawingml/2006/main">
-            <a:srgbClr val="0E1B3E"/>
+            <a:srgbClr val="070F26"/>
           </a:solidFill>
           <a:ln xmlns:a="http://schemas.openxmlformats.org/drawingml/2006/main" w="0">
             <a:solidFill>
@@ -3550,7 +3550,7 @@
           <p:nvPr/>
         </p:nvPicPr>
         <p:blipFill>
-          <a:blip xmlns:r="http://schemas.openxmlformats.org/officeDocument/2006/relationships" xmlns:a="http://schemas.openxmlformats.org/drawingml/2006/main" r:embed="Rcb8e5dc274d14d98"/>
+          <a:blip xmlns:r="http://schemas.openxmlformats.org/officeDocument/2006/relationships" xmlns:a="http://schemas.openxmlformats.org/drawingml/2006/main" r:embed="Rb73235f382b346bb"/>
           <a:stretch xmlns:a="http://schemas.openxmlformats.org/drawingml/2006/main"/>
         </p:blipFill>
         <p:spPr>
@@ -3568,7 +3568,7 @@
           <p:cNvPr id="3" name="">
             <a:extLst xmlns:a="http://schemas.openxmlformats.org/drawingml/2006/main">
               <a:ext uri="{FF2B5EF4-FFF2-40B4-BE49-F238E27FC236}">
-                <a16:creationId xmlns:a16="http://schemas.microsoft.com/office/drawing/2014/main" id="{00E81CC7-4020-49D3-96F4-51E3D42A3AFA}"/>
+                <a16:creationId xmlns:a16="http://schemas.microsoft.com/office/drawing/2014/main" id="{0F54EB8D-F429-47C2-9A57-783800FAFECB}"/>
               </a:ext>
             </a:extLst>
           </p:cNvPr>
@@ -3626,7 +3626,7 @@
           <p:cNvPr id="4" name="">
             <a:extLst xmlns:a="http://schemas.openxmlformats.org/drawingml/2006/main">
               <a:ext uri="{FF2B5EF4-FFF2-40B4-BE49-F238E27FC236}">
-                <a16:creationId xmlns:a16="http://schemas.microsoft.com/office/drawing/2014/main" id="{5C98C977-6C07-4096-BD54-CE6EB3F62E4C}"/>
+                <a16:creationId xmlns:a16="http://schemas.microsoft.com/office/drawing/2014/main" id="{8B74D60A-2CAF-4C8B-8399-0D4B5009B5D0}"/>
               </a:ext>
             </a:extLst>
           </p:cNvPr>
@@ -3684,7 +3684,7 @@
           <p:cNvPr id="5" name="">
             <a:extLst xmlns:a="http://schemas.openxmlformats.org/drawingml/2006/main">
               <a:ext uri="{FF2B5EF4-FFF2-40B4-BE49-F238E27FC236}">
-                <a16:creationId xmlns:a16="http://schemas.microsoft.com/office/drawing/2014/main" id="{35CF80BF-92DE-4CF4-BD95-3FCC4FB01551}"/>
+                <a16:creationId xmlns:a16="http://schemas.microsoft.com/office/drawing/2014/main" id="{87273623-C2FE-4B0B-A119-2D1E5D0AFB51}"/>
               </a:ext>
             </a:extLst>
           </p:cNvPr>
@@ -3742,7 +3742,7 @@
           <p:cNvPr id="6" name="">
             <a:extLst xmlns:a="http://schemas.openxmlformats.org/drawingml/2006/main">
               <a:ext uri="{FF2B5EF4-FFF2-40B4-BE49-F238E27FC236}">
-                <a16:creationId xmlns:a16="http://schemas.microsoft.com/office/drawing/2014/main" id="{C7734012-537E-4A6D-BF89-CAB07C4F3346}"/>
+                <a16:creationId xmlns:a16="http://schemas.microsoft.com/office/drawing/2014/main" id="{5D124335-EA68-4284-8EEA-5AE9AC84AC1A}"/>
               </a:ext>
             </a:extLst>
           </p:cNvPr>
@@ -3804,13 +3804,13 @@
           <p:nvPr/>
         </p:nvPicPr>
         <p:blipFill>
-          <a:blip xmlns:r="http://schemas.openxmlformats.org/officeDocument/2006/relationships" xmlns:a="http://schemas.openxmlformats.org/drawingml/2006/main" r:embed="R6aac110a5c024651"/>
+          <a:blip xmlns:r="http://schemas.openxmlformats.org/officeDocument/2006/relationships" xmlns:a="http://schemas.openxmlformats.org/drawingml/2006/main" r:embed="Rc291830ef6354328"/>
           <a:stretch xmlns:a="http://schemas.openxmlformats.org/drawingml/2006/main"/>
         </p:blipFill>
         <p:spPr>
           <a:xfrm xmlns:a="http://schemas.openxmlformats.org/drawingml/2006/main">
-            <a:off x="476250" y="1257300"/>
-            <a:ext cx="2667000" cy="4533900"/>
+            <a:off x="0" y="1746250"/>
+            <a:ext cx="2667000" cy="3556000"/>
           </a:xfrm>
           <a:prstGeom xmlns:a="http://schemas.openxmlformats.org/drawingml/2006/main" prst="rect">
             <a:avLst/>
@@ -3822,7 +3822,7 @@
           <p:cNvPr id="8" name="">
             <a:extLst xmlns:a="http://schemas.openxmlformats.org/drawingml/2006/main">
               <a:ext uri="{FF2B5EF4-FFF2-40B4-BE49-F238E27FC236}">
-                <a16:creationId xmlns:a16="http://schemas.microsoft.com/office/drawing/2014/main" id="{FFFD164A-0F36-42C5-8228-5176BF9EDE28}"/>
+                <a16:creationId xmlns:a16="http://schemas.microsoft.com/office/drawing/2014/main" id="{D11DE10D-DECF-4FCD-8B37-5C35460ABD81}"/>
               </a:ext>
             </a:extLst>
           </p:cNvPr>
@@ -3880,7 +3880,7 @@
           <p:cNvPr id="9" name="">
             <a:extLst xmlns:a="http://schemas.openxmlformats.org/drawingml/2006/main">
               <a:ext uri="{FF2B5EF4-FFF2-40B4-BE49-F238E27FC236}">
-                <a16:creationId xmlns:a16="http://schemas.microsoft.com/office/drawing/2014/main" id="{5E601DA6-67A8-4C78-B24E-2B41932E0994}"/>
+                <a16:creationId xmlns:a16="http://schemas.microsoft.com/office/drawing/2014/main" id="{A43E9ECD-39D6-4FBE-A34A-CC73CCCC9CEB}"/>
               </a:ext>
             </a:extLst>
           </p:cNvPr>
@@ -3938,7 +3938,7 @@
           <p:cNvPr id="10" name="">
             <a:extLst xmlns:a="http://schemas.openxmlformats.org/drawingml/2006/main">
               <a:ext uri="{FF2B5EF4-FFF2-40B4-BE49-F238E27FC236}">
-                <a16:creationId xmlns:a16="http://schemas.microsoft.com/office/drawing/2014/main" id="{23FAEA96-F463-42D5-A2DF-4565D007B0CD}"/>
+                <a16:creationId xmlns:a16="http://schemas.microsoft.com/office/drawing/2014/main" id="{7843A449-6BC9-49CD-9568-AB3FB9FFC33F}"/>
               </a:ext>
             </a:extLst>
           </p:cNvPr>
@@ -3994,7 +3994,7 @@
     </p:spTree>
     <p:extLst>
       <p:ext uri="{BB962C8B-B14F-4D97-AF65-F5344CB8AC3E}">
-        <p14:creationId xmlns:p14="http://schemas.microsoft.com/office/powerpoint/2010/main" val="1265387607"/>
+        <p14:creationId xmlns:p14="http://schemas.microsoft.com/office/powerpoint/2010/main" val="974079626"/>
       </p:ext>
     </p:extLst>
   </p:cSld>
@@ -4025,7 +4025,7 @@
           <p:cNvPr id="1" name="">
             <a:extLst xmlns:a="http://schemas.openxmlformats.org/drawingml/2006/main">
               <a:ext uri="{FF2B5EF4-FFF2-40B4-BE49-F238E27FC236}">
-                <a16:creationId xmlns:a16="http://schemas.microsoft.com/office/drawing/2014/main" id="{F8A12037-8C41-4408-B01D-C2CBD9811BBA}"/>
+                <a16:creationId xmlns:a16="http://schemas.microsoft.com/office/drawing/2014/main" id="{E47D9C06-193B-4A99-9B9A-068B7E488D93}"/>
               </a:ext>
             </a:extLst>
           </p:cNvPr>
@@ -4064,7 +4064,7 @@
           <p:nvPr/>
         </p:nvPicPr>
         <p:blipFill>
-          <a:blip xmlns:r="http://schemas.openxmlformats.org/officeDocument/2006/relationships" xmlns:a="http://schemas.openxmlformats.org/drawingml/2006/main" r:embed="Rf15fdd940a9e41f7"/>
+          <a:blip xmlns:r="http://schemas.openxmlformats.org/officeDocument/2006/relationships" xmlns:a="http://schemas.openxmlformats.org/drawingml/2006/main" r:embed="R293277e24deb4bf3"/>
           <a:stretch xmlns:a="http://schemas.openxmlformats.org/drawingml/2006/main"/>
         </p:blipFill>
         <p:spPr>
@@ -4082,7 +4082,7 @@
           <p:cNvPr id="3" name="">
             <a:extLst xmlns:a="http://schemas.openxmlformats.org/drawingml/2006/main">
               <a:ext uri="{FF2B5EF4-FFF2-40B4-BE49-F238E27FC236}">
-                <a16:creationId xmlns:a16="http://schemas.microsoft.com/office/drawing/2014/main" id="{A653F3B2-073D-4DC4-900A-6350902E56A7}"/>
+                <a16:creationId xmlns:a16="http://schemas.microsoft.com/office/drawing/2014/main" id="{C3D82379-26A0-4524-A381-F7F6FC170B9E}"/>
               </a:ext>
             </a:extLst>
           </p:cNvPr>
@@ -4120,14 +4120,14 @@
             <a:pPr algn="r">
               <a:defRPr sz="825" b="1">
                 <a:solidFill>
-                  <a:srgbClr val="0E1B3E"/>
+                  <a:srgbClr val="070F26"/>
                 </a:solidFill>
               </a:defRPr>
             </a:pPr>
             <a:r>
               <a:rPr sz="825" b="1">
                 <a:solidFill>
-                  <a:srgbClr val="0E1B3E"/>
+                  <a:srgbClr val="070F26"/>
                 </a:solidFill>
               </a:rPr>
               <a:t>NTT DATA UNIVERSITY</a:t>
@@ -4140,7 +4140,7 @@
           <p:cNvPr id="4" name="">
             <a:extLst xmlns:a="http://schemas.openxmlformats.org/drawingml/2006/main">
               <a:ext uri="{FF2B5EF4-FFF2-40B4-BE49-F238E27FC236}">
-                <a16:creationId xmlns:a16="http://schemas.microsoft.com/office/drawing/2014/main" id="{24FDF868-3496-470D-9CE7-F5B502A74CD8}"/>
+                <a16:creationId xmlns:a16="http://schemas.microsoft.com/office/drawing/2014/main" id="{4E09B0D0-ECB6-48F5-9308-319DCD22F579}"/>
               </a:ext>
             </a:extLst>
           </p:cNvPr>
@@ -4198,7 +4198,7 @@
           <p:cNvPr id="5" name="">
             <a:extLst xmlns:a="http://schemas.openxmlformats.org/drawingml/2006/main">
               <a:ext uri="{FF2B5EF4-FFF2-40B4-BE49-F238E27FC236}">
-                <a16:creationId xmlns:a16="http://schemas.microsoft.com/office/drawing/2014/main" id="{AA895887-DC62-4144-978C-FD8DD8F4BD5C}"/>
+                <a16:creationId xmlns:a16="http://schemas.microsoft.com/office/drawing/2014/main" id="{89FBC5D6-1F5C-423A-8AD7-EDE90080A0B6}"/>
               </a:ext>
             </a:extLst>
           </p:cNvPr>
@@ -4256,7 +4256,7 @@
           <p:cNvPr id="6" name="">
             <a:extLst xmlns:a="http://schemas.openxmlformats.org/drawingml/2006/main">
               <a:ext uri="{FF2B5EF4-FFF2-40B4-BE49-F238E27FC236}">
-                <a16:creationId xmlns:a16="http://schemas.microsoft.com/office/drawing/2014/main" id="{26AA1F34-D8FD-42EB-B16B-09A3EE4E25D0}"/>
+                <a16:creationId xmlns:a16="http://schemas.microsoft.com/office/drawing/2014/main" id="{B3E4EE97-A85F-4145-9F51-7C9ACE03F4D2}"/>
               </a:ext>
             </a:extLst>
           </p:cNvPr>
@@ -4294,14 +4294,14 @@
             <a:pPr algn="r">
               <a:defRPr sz="675" b="1">
                 <a:solidFill>
-                  <a:srgbClr val="0E1B3E"/>
+                  <a:srgbClr val="070F26"/>
                 </a:solidFill>
               </a:defRPr>
             </a:pPr>
             <a:r>
               <a:rPr sz="675" b="1">
                 <a:solidFill>
-                  <a:srgbClr val="0E1B3E"/>
+                  <a:srgbClr val="070F26"/>
                 </a:solidFill>
               </a:rPr>
               <a:t>NTT DATA UNIVERSITY</a:t>
@@ -4314,7 +4314,7 @@
           <p:cNvPr id="7" name="">
             <a:extLst xmlns:a="http://schemas.openxmlformats.org/drawingml/2006/main">
               <a:ext uri="{FF2B5EF4-FFF2-40B4-BE49-F238E27FC236}">
-                <a16:creationId xmlns:a16="http://schemas.microsoft.com/office/drawing/2014/main" id="{AD050578-CC7C-4C10-918E-04F4328BDCF2}"/>
+                <a16:creationId xmlns:a16="http://schemas.microsoft.com/office/drawing/2014/main" id="{5FAABA0A-5F18-4441-BED5-086270C179E9}"/>
               </a:ext>
             </a:extLst>
           </p:cNvPr>
@@ -4372,7 +4372,7 @@
           <p:cNvPr id="8" name="">
             <a:extLst xmlns:a="http://schemas.openxmlformats.org/drawingml/2006/main">
               <a:ext uri="{FF2B5EF4-FFF2-40B4-BE49-F238E27FC236}">
-                <a16:creationId xmlns:a16="http://schemas.microsoft.com/office/drawing/2014/main" id="{6AB85DEB-FF51-4A97-9A7B-1099300F0B1E}"/>
+                <a16:creationId xmlns:a16="http://schemas.microsoft.com/office/drawing/2014/main" id="{F497DC85-4FC7-4DBA-9925-D69BF44243BD}"/>
               </a:ext>
             </a:extLst>
           </p:cNvPr>
@@ -4410,14 +4410,14 @@
             <a:pPr algn="l">
               <a:defRPr sz="2400" b="0">
                 <a:solidFill>
-                  <a:srgbClr val="0E1B3E"/>
+                  <a:srgbClr val="070F26"/>
                 </a:solidFill>
               </a:defRPr>
             </a:pPr>
             <a:r>
               <a:rPr sz="2400" b="0">
                 <a:solidFill>
-                  <a:srgbClr val="0E1B3E"/>
+                  <a:srgbClr val="070F26"/>
                 </a:solidFill>
               </a:rPr>
               <a:t>Execute 3 vezes seguidas — verifique invariância</a:t>
@@ -4430,7 +4430,7 @@
           <p:cNvPr id="9" name="">
             <a:extLst xmlns:a="http://schemas.openxmlformats.org/drawingml/2006/main">
               <a:ext uri="{FF2B5EF4-FFF2-40B4-BE49-F238E27FC236}">
-                <a16:creationId xmlns:a16="http://schemas.microsoft.com/office/drawing/2014/main" id="{3C0E4950-BDEE-41AC-80AE-3E962AD1591B}"/>
+                <a16:creationId xmlns:a16="http://schemas.microsoft.com/office/drawing/2014/main" id="{4D350904-22A0-4DD4-AA9B-E2C1C07D54A0}"/>
               </a:ext>
             </a:extLst>
           </p:cNvPr>
@@ -4488,7 +4488,7 @@
           <p:cNvPr id="10" name="">
             <a:extLst xmlns:a="http://schemas.openxmlformats.org/drawingml/2006/main">
               <a:ext uri="{FF2B5EF4-FFF2-40B4-BE49-F238E27FC236}">
-                <a16:creationId xmlns:a16="http://schemas.microsoft.com/office/drawing/2014/main" id="{7AE0E76C-1C70-4735-8A0F-7BF77109EF6E}"/>
+                <a16:creationId xmlns:a16="http://schemas.microsoft.com/office/drawing/2014/main" id="{F418A927-24F4-40C9-A4F3-B9CC5A8FCC01}"/>
               </a:ext>
             </a:extLst>
           </p:cNvPr>
@@ -4521,7 +4521,7 @@
           <p:cNvPr id="11" name="">
             <a:extLst xmlns:a="http://schemas.openxmlformats.org/drawingml/2006/main">
               <a:ext uri="{FF2B5EF4-FFF2-40B4-BE49-F238E27FC236}">
-                <a16:creationId xmlns:a16="http://schemas.microsoft.com/office/drawing/2014/main" id="{8FD772D8-083D-414C-94AC-31529E5CE257}"/>
+                <a16:creationId xmlns:a16="http://schemas.microsoft.com/office/drawing/2014/main" id="{E064DEFE-6D78-46C2-9EA0-C2ED13F35FB8}"/>
               </a:ext>
             </a:extLst>
           </p:cNvPr>
@@ -4556,7 +4556,7 @@
           <p:cNvPr id="12" name="">
             <a:extLst xmlns:a="http://schemas.openxmlformats.org/drawingml/2006/main">
               <a:ext uri="{FF2B5EF4-FFF2-40B4-BE49-F238E27FC236}">
-                <a16:creationId xmlns:a16="http://schemas.microsoft.com/office/drawing/2014/main" id="{465E922C-27F3-4782-930F-12D6B2387D2D}"/>
+                <a16:creationId xmlns:a16="http://schemas.microsoft.com/office/drawing/2014/main" id="{5FBBD78D-673F-4A60-B3E4-87F6E9EA3755}"/>
               </a:ext>
             </a:extLst>
           </p:cNvPr>
@@ -4614,7 +4614,7 @@
           <p:cNvPr id="13" name="">
             <a:extLst xmlns:a="http://schemas.openxmlformats.org/drawingml/2006/main">
               <a:ext uri="{FF2B5EF4-FFF2-40B4-BE49-F238E27FC236}">
-                <a16:creationId xmlns:a16="http://schemas.microsoft.com/office/drawing/2014/main" id="{37A4115C-02BF-483F-97F5-CE694999EF7A}"/>
+                <a16:creationId xmlns:a16="http://schemas.microsoft.com/office/drawing/2014/main" id="{5BF221AA-E425-4436-882A-89B65FF8E9B9}"/>
               </a:ext>
             </a:extLst>
           </p:cNvPr>
@@ -4830,7 +4830,7 @@
           <p:cNvPr id="14" name="">
             <a:extLst xmlns:a="http://schemas.openxmlformats.org/drawingml/2006/main">
               <a:ext uri="{FF2B5EF4-FFF2-40B4-BE49-F238E27FC236}">
-                <a16:creationId xmlns:a16="http://schemas.microsoft.com/office/drawing/2014/main" id="{A097CCE4-DC02-424B-A281-45907AD40E54}"/>
+                <a16:creationId xmlns:a16="http://schemas.microsoft.com/office/drawing/2014/main" id="{BF9460A1-1043-4F47-89D0-FCB4D8355EB8}"/>
               </a:ext>
             </a:extLst>
           </p:cNvPr>
@@ -4863,7 +4863,7 @@
           <p:cNvPr id="15" name="">
             <a:extLst xmlns:a="http://schemas.openxmlformats.org/drawingml/2006/main">
               <a:ext uri="{FF2B5EF4-FFF2-40B4-BE49-F238E27FC236}">
-                <a16:creationId xmlns:a16="http://schemas.microsoft.com/office/drawing/2014/main" id="{A5300A0F-5304-478D-A0E7-FF2B7240CF46}"/>
+                <a16:creationId xmlns:a16="http://schemas.microsoft.com/office/drawing/2014/main" id="{35D546EA-29F8-4CBA-B266-54A86E16A357}"/>
               </a:ext>
             </a:extLst>
           </p:cNvPr>
@@ -4898,7 +4898,7 @@
           <p:cNvPr id="16" name="">
             <a:extLst xmlns:a="http://schemas.openxmlformats.org/drawingml/2006/main">
               <a:ext uri="{FF2B5EF4-FFF2-40B4-BE49-F238E27FC236}">
-                <a16:creationId xmlns:a16="http://schemas.microsoft.com/office/drawing/2014/main" id="{A85F57A9-7CC3-49BD-9189-D568507D812C}"/>
+                <a16:creationId xmlns:a16="http://schemas.microsoft.com/office/drawing/2014/main" id="{1BD02BBB-55BE-491F-88FC-AEF7B242CEF6}"/>
               </a:ext>
             </a:extLst>
           </p:cNvPr>
@@ -4956,7 +4956,7 @@
           <p:cNvPr id="17" name="">
             <a:extLst xmlns:a="http://schemas.openxmlformats.org/drawingml/2006/main">
               <a:ext uri="{FF2B5EF4-FFF2-40B4-BE49-F238E27FC236}">
-                <a16:creationId xmlns:a16="http://schemas.microsoft.com/office/drawing/2014/main" id="{1E3BE0C4-EF93-423F-A0E2-5F1CDDBBA228}"/>
+                <a16:creationId xmlns:a16="http://schemas.microsoft.com/office/drawing/2014/main" id="{3A3460B7-6986-44DE-BA08-62C18676BDAB}"/>
               </a:ext>
             </a:extLst>
           </p:cNvPr>
@@ -5175,7 +5175,7 @@
     </p:spTree>
     <p:extLst>
       <p:ext uri="{BB962C8B-B14F-4D97-AF65-F5344CB8AC3E}">
-        <p14:creationId xmlns:p14="http://schemas.microsoft.com/office/powerpoint/2010/main" val="1442365311"/>
+        <p14:creationId xmlns:p14="http://schemas.microsoft.com/office/powerpoint/2010/main" val="722809384"/>
       </p:ext>
     </p:extLst>
   </p:cSld>
@@ -5206,7 +5206,7 @@
           <p:cNvPr id="1" name="">
             <a:extLst xmlns:a="http://schemas.openxmlformats.org/drawingml/2006/main">
               <a:ext uri="{FF2B5EF4-FFF2-40B4-BE49-F238E27FC236}">
-                <a16:creationId xmlns:a16="http://schemas.microsoft.com/office/drawing/2014/main" id="{CA1D8E9D-EF7B-49B7-AD32-54F8AFB8C776}"/>
+                <a16:creationId xmlns:a16="http://schemas.microsoft.com/office/drawing/2014/main" id="{CC666025-64E4-4EA2-ABF0-AC4FB7B67E6D}"/>
               </a:ext>
             </a:extLst>
           </p:cNvPr>
@@ -5245,7 +5245,7 @@
           <p:nvPr/>
         </p:nvPicPr>
         <p:blipFill>
-          <a:blip xmlns:r="http://schemas.openxmlformats.org/officeDocument/2006/relationships" xmlns:a="http://schemas.openxmlformats.org/drawingml/2006/main" r:embed="Rbce5b74cf22d4147"/>
+          <a:blip xmlns:r="http://schemas.openxmlformats.org/officeDocument/2006/relationships" xmlns:a="http://schemas.openxmlformats.org/drawingml/2006/main" r:embed="R574752cb01aa4f99"/>
           <a:stretch xmlns:a="http://schemas.openxmlformats.org/drawingml/2006/main"/>
         </p:blipFill>
         <p:spPr>
@@ -5263,7 +5263,7 @@
           <p:cNvPr id="3" name="">
             <a:extLst xmlns:a="http://schemas.openxmlformats.org/drawingml/2006/main">
               <a:ext uri="{FF2B5EF4-FFF2-40B4-BE49-F238E27FC236}">
-                <a16:creationId xmlns:a16="http://schemas.microsoft.com/office/drawing/2014/main" id="{9D34DBC2-FC3A-4BF7-B83B-FAD9C401595B}"/>
+                <a16:creationId xmlns:a16="http://schemas.microsoft.com/office/drawing/2014/main" id="{03B07E8E-909E-4DE4-B962-E91B0431BDA0}"/>
               </a:ext>
             </a:extLst>
           </p:cNvPr>
@@ -5301,14 +5301,14 @@
             <a:pPr algn="r">
               <a:defRPr sz="825" b="1">
                 <a:solidFill>
-                  <a:srgbClr val="0E1B3E"/>
+                  <a:srgbClr val="070F26"/>
                 </a:solidFill>
               </a:defRPr>
             </a:pPr>
             <a:r>
               <a:rPr sz="825" b="1">
                 <a:solidFill>
-                  <a:srgbClr val="0E1B3E"/>
+                  <a:srgbClr val="070F26"/>
                 </a:solidFill>
               </a:rPr>
               <a:t>NTT DATA UNIVERSITY</a:t>
@@ -5321,7 +5321,7 @@
           <p:cNvPr id="4" name="">
             <a:extLst xmlns:a="http://schemas.openxmlformats.org/drawingml/2006/main">
               <a:ext uri="{FF2B5EF4-FFF2-40B4-BE49-F238E27FC236}">
-                <a16:creationId xmlns:a16="http://schemas.microsoft.com/office/drawing/2014/main" id="{BCEFF8D7-76D4-47C7-923E-2209BD82C7F7}"/>
+                <a16:creationId xmlns:a16="http://schemas.microsoft.com/office/drawing/2014/main" id="{4B7AC357-88F1-4AF2-AD41-309FCCA57BF5}"/>
               </a:ext>
             </a:extLst>
           </p:cNvPr>
@@ -5379,7 +5379,7 @@
           <p:cNvPr id="5" name="">
             <a:extLst xmlns:a="http://schemas.openxmlformats.org/drawingml/2006/main">
               <a:ext uri="{FF2B5EF4-FFF2-40B4-BE49-F238E27FC236}">
-                <a16:creationId xmlns:a16="http://schemas.microsoft.com/office/drawing/2014/main" id="{37F78069-4426-4FF7-9179-4439D960064E}"/>
+                <a16:creationId xmlns:a16="http://schemas.microsoft.com/office/drawing/2014/main" id="{F279BB99-2CFA-4CBD-A03E-9DCB0BA5CF3F}"/>
               </a:ext>
             </a:extLst>
           </p:cNvPr>
@@ -5437,7 +5437,7 @@
           <p:cNvPr id="6" name="">
             <a:extLst xmlns:a="http://schemas.openxmlformats.org/drawingml/2006/main">
               <a:ext uri="{FF2B5EF4-FFF2-40B4-BE49-F238E27FC236}">
-                <a16:creationId xmlns:a16="http://schemas.microsoft.com/office/drawing/2014/main" id="{F3FE8A8A-90EE-4627-BCAB-79BC8FFFD5E5}"/>
+                <a16:creationId xmlns:a16="http://schemas.microsoft.com/office/drawing/2014/main" id="{EB3470F5-840B-4F39-95A8-A39799216541}"/>
               </a:ext>
             </a:extLst>
           </p:cNvPr>
@@ -5475,14 +5475,14 @@
             <a:pPr algn="r">
               <a:defRPr sz="675" b="1">
                 <a:solidFill>
-                  <a:srgbClr val="0E1B3E"/>
+                  <a:srgbClr val="070F26"/>
                 </a:solidFill>
               </a:defRPr>
             </a:pPr>
             <a:r>
               <a:rPr sz="675" b="1">
                 <a:solidFill>
-                  <a:srgbClr val="0E1B3E"/>
+                  <a:srgbClr val="070F26"/>
                 </a:solidFill>
               </a:rPr>
               <a:t>NTT DATA UNIVERSITY</a:t>
@@ -5495,7 +5495,7 @@
           <p:cNvPr id="7" name="">
             <a:extLst xmlns:a="http://schemas.openxmlformats.org/drawingml/2006/main">
               <a:ext uri="{FF2B5EF4-FFF2-40B4-BE49-F238E27FC236}">
-                <a16:creationId xmlns:a16="http://schemas.microsoft.com/office/drawing/2014/main" id="{EDA8CBDB-E0DC-4AD5-84EE-A5E85F8ACD8E}"/>
+                <a16:creationId xmlns:a16="http://schemas.microsoft.com/office/drawing/2014/main" id="{CC30838B-DA3A-4CC9-AD88-FE894ACF3D22}"/>
               </a:ext>
             </a:extLst>
           </p:cNvPr>
@@ -5553,7 +5553,7 @@
           <p:cNvPr id="8" name="">
             <a:extLst xmlns:a="http://schemas.openxmlformats.org/drawingml/2006/main">
               <a:ext uri="{FF2B5EF4-FFF2-40B4-BE49-F238E27FC236}">
-                <a16:creationId xmlns:a16="http://schemas.microsoft.com/office/drawing/2014/main" id="{A2650176-AA53-4450-B230-A22D7C08AF6B}"/>
+                <a16:creationId xmlns:a16="http://schemas.microsoft.com/office/drawing/2014/main" id="{E4EBF2DB-5DD6-4E08-B0D3-0410C4961D11}"/>
               </a:ext>
             </a:extLst>
           </p:cNvPr>
@@ -5591,14 +5591,14 @@
             <a:pPr algn="l">
               <a:defRPr sz="2400" b="0">
                 <a:solidFill>
-                  <a:srgbClr val="0E1B3E"/>
+                  <a:srgbClr val="070F26"/>
                 </a:solidFill>
               </a:defRPr>
             </a:pPr>
             <a:r>
               <a:rPr sz="2400" b="0">
                 <a:solidFill>
-                  <a:srgbClr val="0E1B3E"/>
+                  <a:srgbClr val="070F26"/>
                 </a:solidFill>
               </a:rPr>
               <a:t>O que cobrimos hoje</a:t>
@@ -5611,7 +5611,7 @@
           <p:cNvPr id="9" name="">
             <a:extLst xmlns:a="http://schemas.openxmlformats.org/drawingml/2006/main">
               <a:ext uri="{FF2B5EF4-FFF2-40B4-BE49-F238E27FC236}">
-                <a16:creationId xmlns:a16="http://schemas.microsoft.com/office/drawing/2014/main" id="{CE7B7817-B7B7-4748-A20C-318436989593}"/>
+                <a16:creationId xmlns:a16="http://schemas.microsoft.com/office/drawing/2014/main" id="{D95D3AEA-7041-4B03-A266-46E75BEFDC22}"/>
               </a:ext>
             </a:extLst>
           </p:cNvPr>
@@ -5669,7 +5669,7 @@
           <p:cNvPr id="10" name="">
             <a:extLst xmlns:a="http://schemas.openxmlformats.org/drawingml/2006/main">
               <a:ext uri="{FF2B5EF4-FFF2-40B4-BE49-F238E27FC236}">
-                <a16:creationId xmlns:a16="http://schemas.microsoft.com/office/drawing/2014/main" id="{239A4C1E-A6BA-4ABC-87C7-93101206DB98}"/>
+                <a16:creationId xmlns:a16="http://schemas.microsoft.com/office/drawing/2014/main" id="{8EC84976-BB1F-4FF9-A392-4406A7AEF866}"/>
               </a:ext>
             </a:extLst>
           </p:cNvPr>
@@ -5702,7 +5702,7 @@
           <p:cNvPr id="11" name="">
             <a:extLst xmlns:a="http://schemas.openxmlformats.org/drawingml/2006/main">
               <a:ext uri="{FF2B5EF4-FFF2-40B4-BE49-F238E27FC236}">
-                <a16:creationId xmlns:a16="http://schemas.microsoft.com/office/drawing/2014/main" id="{764D74D6-386B-4FA7-A0BF-CEB1C53878BD}"/>
+                <a16:creationId xmlns:a16="http://schemas.microsoft.com/office/drawing/2014/main" id="{9C4C3AD8-6DDA-4319-92DB-0176CE31BE26}"/>
               </a:ext>
             </a:extLst>
           </p:cNvPr>
@@ -5737,7 +5737,7 @@
           <p:cNvPr id="12" name="">
             <a:extLst xmlns:a="http://schemas.openxmlformats.org/drawingml/2006/main">
               <a:ext uri="{FF2B5EF4-FFF2-40B4-BE49-F238E27FC236}">
-                <a16:creationId xmlns:a16="http://schemas.microsoft.com/office/drawing/2014/main" id="{1CE73185-22BE-489D-9264-9FBE99DA50A7}"/>
+                <a16:creationId xmlns:a16="http://schemas.microsoft.com/office/drawing/2014/main" id="{41BB038A-3874-4BF0-AE2B-798587D4C855}"/>
               </a:ext>
             </a:extLst>
           </p:cNvPr>
@@ -5795,7 +5795,7 @@
           <p:cNvPr id="13" name="">
             <a:extLst xmlns:a="http://schemas.openxmlformats.org/drawingml/2006/main">
               <a:ext uri="{FF2B5EF4-FFF2-40B4-BE49-F238E27FC236}">
-                <a16:creationId xmlns:a16="http://schemas.microsoft.com/office/drawing/2014/main" id="{01BA72E1-C9AE-4E13-B9C2-DF3A2D18E5B9}"/>
+                <a16:creationId xmlns:a16="http://schemas.microsoft.com/office/drawing/2014/main" id="{9F1EAD0C-5277-4AEB-8E29-8B91AC0C12F7}"/>
               </a:ext>
             </a:extLst>
           </p:cNvPr>
@@ -5870,7 +5870,7 @@
           <p:cNvPr id="14" name="">
             <a:extLst xmlns:a="http://schemas.openxmlformats.org/drawingml/2006/main">
               <a:ext uri="{FF2B5EF4-FFF2-40B4-BE49-F238E27FC236}">
-                <a16:creationId xmlns:a16="http://schemas.microsoft.com/office/drawing/2014/main" id="{4717C893-8334-4DD8-AAD2-5E3C8CF14C89}"/>
+                <a16:creationId xmlns:a16="http://schemas.microsoft.com/office/drawing/2014/main" id="{4B73FE3D-77D1-4BDE-A0D8-DF5AEC9A7E41}"/>
               </a:ext>
             </a:extLst>
           </p:cNvPr>
@@ -5903,7 +5903,7 @@
           <p:cNvPr id="15" name="">
             <a:extLst xmlns:a="http://schemas.openxmlformats.org/drawingml/2006/main">
               <a:ext uri="{FF2B5EF4-FFF2-40B4-BE49-F238E27FC236}">
-                <a16:creationId xmlns:a16="http://schemas.microsoft.com/office/drawing/2014/main" id="{441807CC-82EF-4179-8FA2-39317A274043}"/>
+                <a16:creationId xmlns:a16="http://schemas.microsoft.com/office/drawing/2014/main" id="{D507053D-2EF2-4270-887A-7C1B3CCCD27E}"/>
               </a:ext>
             </a:extLst>
           </p:cNvPr>
@@ -5938,7 +5938,7 @@
           <p:cNvPr id="16" name="">
             <a:extLst xmlns:a="http://schemas.openxmlformats.org/drawingml/2006/main">
               <a:ext uri="{FF2B5EF4-FFF2-40B4-BE49-F238E27FC236}">
-                <a16:creationId xmlns:a16="http://schemas.microsoft.com/office/drawing/2014/main" id="{79ACA50B-1CED-4A4A-90EC-320D1FDC86F7}"/>
+                <a16:creationId xmlns:a16="http://schemas.microsoft.com/office/drawing/2014/main" id="{481A1DF5-1B8A-4E9F-82BB-80441891A6CB}"/>
               </a:ext>
             </a:extLst>
           </p:cNvPr>
@@ -5996,7 +5996,7 @@
           <p:cNvPr id="17" name="">
             <a:extLst xmlns:a="http://schemas.openxmlformats.org/drawingml/2006/main">
               <a:ext uri="{FF2B5EF4-FFF2-40B4-BE49-F238E27FC236}">
-                <a16:creationId xmlns:a16="http://schemas.microsoft.com/office/drawing/2014/main" id="{7F2684BD-98B8-4526-BD6D-4E68B1900AC0}"/>
+                <a16:creationId xmlns:a16="http://schemas.microsoft.com/office/drawing/2014/main" id="{239E3430-3973-4243-B7E3-F18F2F844105}"/>
               </a:ext>
             </a:extLst>
           </p:cNvPr>
@@ -6071,7 +6071,7 @@
           <p:cNvPr id="18" name="">
             <a:extLst xmlns:a="http://schemas.openxmlformats.org/drawingml/2006/main">
               <a:ext uri="{FF2B5EF4-FFF2-40B4-BE49-F238E27FC236}">
-                <a16:creationId xmlns:a16="http://schemas.microsoft.com/office/drawing/2014/main" id="{28F9E989-D6EF-472F-A822-029F7D4B5DD0}"/>
+                <a16:creationId xmlns:a16="http://schemas.microsoft.com/office/drawing/2014/main" id="{C4AAE407-9FB3-4E62-8126-D19D0D97BABC}"/>
               </a:ext>
             </a:extLst>
           </p:cNvPr>
@@ -6104,7 +6104,7 @@
           <p:cNvPr id="19" name="">
             <a:extLst xmlns:a="http://schemas.openxmlformats.org/drawingml/2006/main">
               <a:ext uri="{FF2B5EF4-FFF2-40B4-BE49-F238E27FC236}">
-                <a16:creationId xmlns:a16="http://schemas.microsoft.com/office/drawing/2014/main" id="{D0EAE859-DBAD-4138-B301-94088E10E1DC}"/>
+                <a16:creationId xmlns:a16="http://schemas.microsoft.com/office/drawing/2014/main" id="{7A0B34AA-B61B-498D-B719-9CA7FC422AC4}"/>
               </a:ext>
             </a:extLst>
           </p:cNvPr>
@@ -6139,7 +6139,7 @@
           <p:cNvPr id="20" name="">
             <a:extLst xmlns:a="http://schemas.openxmlformats.org/drawingml/2006/main">
               <a:ext uri="{FF2B5EF4-FFF2-40B4-BE49-F238E27FC236}">
-                <a16:creationId xmlns:a16="http://schemas.microsoft.com/office/drawing/2014/main" id="{C0535A81-C18F-4C76-AB8C-56FA635DA64B}"/>
+                <a16:creationId xmlns:a16="http://schemas.microsoft.com/office/drawing/2014/main" id="{03348AFE-27D1-481D-B3A6-04FD2E8CEBF9}"/>
               </a:ext>
             </a:extLst>
           </p:cNvPr>
@@ -6197,7 +6197,7 @@
           <p:cNvPr id="21" name="">
             <a:extLst xmlns:a="http://schemas.openxmlformats.org/drawingml/2006/main">
               <a:ext uri="{FF2B5EF4-FFF2-40B4-BE49-F238E27FC236}">
-                <a16:creationId xmlns:a16="http://schemas.microsoft.com/office/drawing/2014/main" id="{FC9F3B7D-9ACA-4769-AA58-4CE733FC564D}"/>
+                <a16:creationId xmlns:a16="http://schemas.microsoft.com/office/drawing/2014/main" id="{B8A69D15-C4D0-4604-AF2F-B1B85949C351}"/>
               </a:ext>
             </a:extLst>
           </p:cNvPr>
@@ -6272,7 +6272,7 @@
           <p:cNvPr id="22" name="">
             <a:extLst xmlns:a="http://schemas.openxmlformats.org/drawingml/2006/main">
               <a:ext uri="{FF2B5EF4-FFF2-40B4-BE49-F238E27FC236}">
-                <a16:creationId xmlns:a16="http://schemas.microsoft.com/office/drawing/2014/main" id="{12B48D8A-D757-43DD-B8A2-806AF1FA35AC}"/>
+                <a16:creationId xmlns:a16="http://schemas.microsoft.com/office/drawing/2014/main" id="{965AE43C-E7C8-4DB1-94D0-9E4EC640D99B}"/>
               </a:ext>
             </a:extLst>
           </p:cNvPr>
@@ -6305,7 +6305,7 @@
           <p:cNvPr id="23" name="">
             <a:extLst xmlns:a="http://schemas.openxmlformats.org/drawingml/2006/main">
               <a:ext uri="{FF2B5EF4-FFF2-40B4-BE49-F238E27FC236}">
-                <a16:creationId xmlns:a16="http://schemas.microsoft.com/office/drawing/2014/main" id="{4C02D2FE-B89D-4F83-94AA-E43B130EF4F5}"/>
+                <a16:creationId xmlns:a16="http://schemas.microsoft.com/office/drawing/2014/main" id="{6951DF06-736C-428C-B09A-AAB572074408}"/>
               </a:ext>
             </a:extLst>
           </p:cNvPr>
@@ -6340,7 +6340,7 @@
           <p:cNvPr id="24" name="">
             <a:extLst xmlns:a="http://schemas.openxmlformats.org/drawingml/2006/main">
               <a:ext uri="{FF2B5EF4-FFF2-40B4-BE49-F238E27FC236}">
-                <a16:creationId xmlns:a16="http://schemas.microsoft.com/office/drawing/2014/main" id="{9CE8DE07-CCBA-4BEC-BF69-88AF373D758A}"/>
+                <a16:creationId xmlns:a16="http://schemas.microsoft.com/office/drawing/2014/main" id="{8F918A8D-9C0B-4EC1-B3A3-DFF27AA9E1F2}"/>
               </a:ext>
             </a:extLst>
           </p:cNvPr>
@@ -6398,7 +6398,7 @@
           <p:cNvPr id="25" name="">
             <a:extLst xmlns:a="http://schemas.openxmlformats.org/drawingml/2006/main">
               <a:ext uri="{FF2B5EF4-FFF2-40B4-BE49-F238E27FC236}">
-                <a16:creationId xmlns:a16="http://schemas.microsoft.com/office/drawing/2014/main" id="{1B65BCB2-4C2C-49A9-AAF9-9400A1C434E5}"/>
+                <a16:creationId xmlns:a16="http://schemas.microsoft.com/office/drawing/2014/main" id="{48C5DE34-6561-427F-B1C8-E1C5286EF0F7}"/>
               </a:ext>
             </a:extLst>
           </p:cNvPr>
@@ -6471,7 +6471,7 @@
     </p:spTree>
     <p:extLst>
       <p:ext uri="{BB962C8B-B14F-4D97-AF65-F5344CB8AC3E}">
-        <p14:creationId xmlns:p14="http://schemas.microsoft.com/office/powerpoint/2010/main" val="548446332"/>
+        <p14:creationId xmlns:p14="http://schemas.microsoft.com/office/powerpoint/2010/main" val="1734603244"/>
       </p:ext>
     </p:extLst>
   </p:cSld>
@@ -6502,7 +6502,7 @@
           <p:cNvPr id="1" name="">
             <a:extLst xmlns:a="http://schemas.openxmlformats.org/drawingml/2006/main">
               <a:ext uri="{FF2B5EF4-FFF2-40B4-BE49-F238E27FC236}">
-                <a16:creationId xmlns:a16="http://schemas.microsoft.com/office/drawing/2014/main" id="{DF7DAF1B-9E2C-4825-8FB2-1CD2CCAF8378}"/>
+                <a16:creationId xmlns:a16="http://schemas.microsoft.com/office/drawing/2014/main" id="{2BD29304-8980-4661-BE41-6BD090E557EF}"/>
               </a:ext>
             </a:extLst>
           </p:cNvPr>
@@ -6541,7 +6541,7 @@
           <p:nvPr/>
         </p:nvPicPr>
         <p:blipFill>
-          <a:blip xmlns:r="http://schemas.openxmlformats.org/officeDocument/2006/relationships" xmlns:a="http://schemas.openxmlformats.org/drawingml/2006/main" r:embed="R68e2a7bc93474ced"/>
+          <a:blip xmlns:r="http://schemas.openxmlformats.org/officeDocument/2006/relationships" xmlns:a="http://schemas.openxmlformats.org/drawingml/2006/main" r:embed="Rf5a7e4532cb6492a"/>
           <a:stretch xmlns:a="http://schemas.openxmlformats.org/drawingml/2006/main"/>
         </p:blipFill>
         <p:spPr>
@@ -6559,7 +6559,7 @@
           <p:cNvPr id="3" name="">
             <a:extLst xmlns:a="http://schemas.openxmlformats.org/drawingml/2006/main">
               <a:ext uri="{FF2B5EF4-FFF2-40B4-BE49-F238E27FC236}">
-                <a16:creationId xmlns:a16="http://schemas.microsoft.com/office/drawing/2014/main" id="{AD2EBDEC-6572-4255-B315-A298CEFBA49E}"/>
+                <a16:creationId xmlns:a16="http://schemas.microsoft.com/office/drawing/2014/main" id="{5E04F471-411E-462C-B7B6-D52ABA27FF21}"/>
               </a:ext>
             </a:extLst>
           </p:cNvPr>
@@ -6597,14 +6597,14 @@
             <a:pPr algn="r">
               <a:defRPr sz="825" b="1">
                 <a:solidFill>
-                  <a:srgbClr val="0E1B3E"/>
+                  <a:srgbClr val="070F26"/>
                 </a:solidFill>
               </a:defRPr>
             </a:pPr>
             <a:r>
               <a:rPr sz="825" b="1">
                 <a:solidFill>
-                  <a:srgbClr val="0E1B3E"/>
+                  <a:srgbClr val="070F26"/>
                 </a:solidFill>
               </a:rPr>
               <a:t>NTT DATA UNIVERSITY</a:t>
@@ -6617,7 +6617,7 @@
           <p:cNvPr id="4" name="">
             <a:extLst xmlns:a="http://schemas.openxmlformats.org/drawingml/2006/main">
               <a:ext uri="{FF2B5EF4-FFF2-40B4-BE49-F238E27FC236}">
-                <a16:creationId xmlns:a16="http://schemas.microsoft.com/office/drawing/2014/main" id="{6A0EEA03-E388-4C6B-B4BD-73520AF4AEDD}"/>
+                <a16:creationId xmlns:a16="http://schemas.microsoft.com/office/drawing/2014/main" id="{A26C1F2E-6D98-4571-AC4E-E303B5595C28}"/>
               </a:ext>
             </a:extLst>
           </p:cNvPr>
@@ -6675,7 +6675,7 @@
           <p:cNvPr id="5" name="">
             <a:extLst xmlns:a="http://schemas.openxmlformats.org/drawingml/2006/main">
               <a:ext uri="{FF2B5EF4-FFF2-40B4-BE49-F238E27FC236}">
-                <a16:creationId xmlns:a16="http://schemas.microsoft.com/office/drawing/2014/main" id="{12DD0408-CD96-4586-A1A7-749A7B1D5836}"/>
+                <a16:creationId xmlns:a16="http://schemas.microsoft.com/office/drawing/2014/main" id="{9EBE7E21-50D8-4F0F-8953-A8945EA6BF5A}"/>
               </a:ext>
             </a:extLst>
           </p:cNvPr>
@@ -6733,7 +6733,7 @@
           <p:cNvPr id="6" name="">
             <a:extLst xmlns:a="http://schemas.openxmlformats.org/drawingml/2006/main">
               <a:ext uri="{FF2B5EF4-FFF2-40B4-BE49-F238E27FC236}">
-                <a16:creationId xmlns:a16="http://schemas.microsoft.com/office/drawing/2014/main" id="{FC00794F-7E27-42D1-8182-F5C8DC305605}"/>
+                <a16:creationId xmlns:a16="http://schemas.microsoft.com/office/drawing/2014/main" id="{BE776B34-D302-4A1B-9171-C84AD99BB58D}"/>
               </a:ext>
             </a:extLst>
           </p:cNvPr>
@@ -6771,14 +6771,14 @@
             <a:pPr algn="r">
               <a:defRPr sz="675" b="1">
                 <a:solidFill>
-                  <a:srgbClr val="0E1B3E"/>
+                  <a:srgbClr val="070F26"/>
                 </a:solidFill>
               </a:defRPr>
             </a:pPr>
             <a:r>
               <a:rPr sz="675" b="1">
                 <a:solidFill>
-                  <a:srgbClr val="0E1B3E"/>
+                  <a:srgbClr val="070F26"/>
                 </a:solidFill>
               </a:rPr>
               <a:t>NTT DATA UNIVERSITY</a:t>
@@ -6791,7 +6791,7 @@
           <p:cNvPr id="7" name="">
             <a:extLst xmlns:a="http://schemas.openxmlformats.org/drawingml/2006/main">
               <a:ext uri="{FF2B5EF4-FFF2-40B4-BE49-F238E27FC236}">
-                <a16:creationId xmlns:a16="http://schemas.microsoft.com/office/drawing/2014/main" id="{1A420DA1-6BC9-46D6-B6D7-35B8A527DC09}"/>
+                <a16:creationId xmlns:a16="http://schemas.microsoft.com/office/drawing/2014/main" id="{BBC58304-42C1-4D7E-A7F3-AA0D00188CBF}"/>
               </a:ext>
             </a:extLst>
           </p:cNvPr>
@@ -6849,7 +6849,7 @@
           <p:cNvPr id="8" name="">
             <a:extLst xmlns:a="http://schemas.openxmlformats.org/drawingml/2006/main">
               <a:ext uri="{FF2B5EF4-FFF2-40B4-BE49-F238E27FC236}">
-                <a16:creationId xmlns:a16="http://schemas.microsoft.com/office/drawing/2014/main" id="{A07BD566-1762-4EBA-AA4F-673DC30DB816}"/>
+                <a16:creationId xmlns:a16="http://schemas.microsoft.com/office/drawing/2014/main" id="{2844990C-4894-4281-ABC5-11A5EBC78EF9}"/>
               </a:ext>
             </a:extLst>
           </p:cNvPr>
@@ -6887,14 +6887,14 @@
             <a:pPr algn="l">
               <a:defRPr sz="2400" b="0">
                 <a:solidFill>
-                  <a:srgbClr val="0E1B3E"/>
+                  <a:srgbClr val="070F26"/>
                 </a:solidFill>
               </a:defRPr>
             </a:pPr>
             <a:r>
               <a:rPr sz="2400" b="0">
                 <a:solidFill>
-                  <a:srgbClr val="0E1B3E"/>
+                  <a:srgbClr val="070F26"/>
                 </a:solidFill>
               </a:rPr>
               <a:t>Módulo 6 — Engenharia de Pipelines</a:t>
@@ -6907,7 +6907,7 @@
           <p:cNvPr id="9" name="">
             <a:extLst xmlns:a="http://schemas.openxmlformats.org/drawingml/2006/main">
               <a:ext uri="{FF2B5EF4-FFF2-40B4-BE49-F238E27FC236}">
-                <a16:creationId xmlns:a16="http://schemas.microsoft.com/office/drawing/2014/main" id="{70855913-E2CE-4741-A163-37CEA387BC40}"/>
+                <a16:creationId xmlns:a16="http://schemas.microsoft.com/office/drawing/2014/main" id="{AAF5EB38-49F1-4332-8103-043FE47A0FB5}"/>
               </a:ext>
             </a:extLst>
           </p:cNvPr>
@@ -6965,7 +6965,7 @@
           <p:cNvPr id="10" name="">
             <a:extLst xmlns:a="http://schemas.openxmlformats.org/drawingml/2006/main">
               <a:ext uri="{FF2B5EF4-FFF2-40B4-BE49-F238E27FC236}">
-                <a16:creationId xmlns:a16="http://schemas.microsoft.com/office/drawing/2014/main" id="{7F55E97A-7DE1-44B6-B645-54B09A628865}"/>
+                <a16:creationId xmlns:a16="http://schemas.microsoft.com/office/drawing/2014/main" id="{11F1DC42-8389-4D7E-A68E-E204ACD8F557}"/>
               </a:ext>
             </a:extLst>
           </p:cNvPr>
@@ -6998,7 +6998,7 @@
           <p:cNvPr id="11" name="">
             <a:extLst xmlns:a="http://schemas.openxmlformats.org/drawingml/2006/main">
               <a:ext uri="{FF2B5EF4-FFF2-40B4-BE49-F238E27FC236}">
-                <a16:creationId xmlns:a16="http://schemas.microsoft.com/office/drawing/2014/main" id="{13B41C6A-21CE-421D-AA64-FD8A2891D6BC}"/>
+                <a16:creationId xmlns:a16="http://schemas.microsoft.com/office/drawing/2014/main" id="{81C18383-A057-43F3-B4D0-D48017651066}"/>
               </a:ext>
             </a:extLst>
           </p:cNvPr>
@@ -7033,7 +7033,7 @@
           <p:cNvPr id="12" name="">
             <a:extLst xmlns:a="http://schemas.openxmlformats.org/drawingml/2006/main">
               <a:ext uri="{FF2B5EF4-FFF2-40B4-BE49-F238E27FC236}">
-                <a16:creationId xmlns:a16="http://schemas.microsoft.com/office/drawing/2014/main" id="{44376BED-8A90-45BE-AC5E-0746ADF006CE}"/>
+                <a16:creationId xmlns:a16="http://schemas.microsoft.com/office/drawing/2014/main" id="{340FB513-DDA4-4DA9-9F13-A8263247D7C0}"/>
               </a:ext>
             </a:extLst>
           </p:cNvPr>
@@ -7091,7 +7091,7 @@
           <p:cNvPr id="13" name="">
             <a:extLst xmlns:a="http://schemas.openxmlformats.org/drawingml/2006/main">
               <a:ext uri="{FF2B5EF4-FFF2-40B4-BE49-F238E27FC236}">
-                <a16:creationId xmlns:a16="http://schemas.microsoft.com/office/drawing/2014/main" id="{14C28C04-C438-4A47-ABC1-1066ACA55FF7}"/>
+                <a16:creationId xmlns:a16="http://schemas.microsoft.com/office/drawing/2014/main" id="{D908D113-C612-4872-8FD6-96C76E2FE6BC}"/>
               </a:ext>
             </a:extLst>
           </p:cNvPr>
@@ -7183,7 +7183,7 @@
           <p:cNvPr id="14" name="">
             <a:extLst xmlns:a="http://schemas.openxmlformats.org/drawingml/2006/main">
               <a:ext uri="{FF2B5EF4-FFF2-40B4-BE49-F238E27FC236}">
-                <a16:creationId xmlns:a16="http://schemas.microsoft.com/office/drawing/2014/main" id="{B2F36556-6D0D-47AB-BE00-570502A693DE}"/>
+                <a16:creationId xmlns:a16="http://schemas.microsoft.com/office/drawing/2014/main" id="{67559F68-DBA5-48E2-B007-2EB363BBB8CF}"/>
               </a:ext>
             </a:extLst>
           </p:cNvPr>
@@ -7216,7 +7216,7 @@
           <p:cNvPr id="15" name="">
             <a:extLst xmlns:a="http://schemas.openxmlformats.org/drawingml/2006/main">
               <a:ext uri="{FF2B5EF4-FFF2-40B4-BE49-F238E27FC236}">
-                <a16:creationId xmlns:a16="http://schemas.microsoft.com/office/drawing/2014/main" id="{5BA5524D-FC87-4D82-86C3-9EECCFF11701}"/>
+                <a16:creationId xmlns:a16="http://schemas.microsoft.com/office/drawing/2014/main" id="{9AF33A6C-E571-4BE2-AC71-46BD8996814B}"/>
               </a:ext>
             </a:extLst>
           </p:cNvPr>
@@ -7251,7 +7251,7 @@
           <p:cNvPr id="16" name="">
             <a:extLst xmlns:a="http://schemas.openxmlformats.org/drawingml/2006/main">
               <a:ext uri="{FF2B5EF4-FFF2-40B4-BE49-F238E27FC236}">
-                <a16:creationId xmlns:a16="http://schemas.microsoft.com/office/drawing/2014/main" id="{6F58CBB6-CD49-4832-B2CE-7F8EF883B5CC}"/>
+                <a16:creationId xmlns:a16="http://schemas.microsoft.com/office/drawing/2014/main" id="{572F4CD2-E52C-476F-B1C7-4CEF3336F215}"/>
               </a:ext>
             </a:extLst>
           </p:cNvPr>
@@ -7309,7 +7309,7 @@
           <p:cNvPr id="17" name="">
             <a:extLst xmlns:a="http://schemas.openxmlformats.org/drawingml/2006/main">
               <a:ext uri="{FF2B5EF4-FFF2-40B4-BE49-F238E27FC236}">
-                <a16:creationId xmlns:a16="http://schemas.microsoft.com/office/drawing/2014/main" id="{1F5D4EDA-C9F3-4498-AB47-613F3A5A836F}"/>
+                <a16:creationId xmlns:a16="http://schemas.microsoft.com/office/drawing/2014/main" id="{8211CAB6-A55E-4422-9999-ECDA45CF4EC0}"/>
               </a:ext>
             </a:extLst>
           </p:cNvPr>
@@ -7401,7 +7401,7 @@
           <p:cNvPr id="18" name="">
             <a:extLst xmlns:a="http://schemas.openxmlformats.org/drawingml/2006/main">
               <a:ext uri="{FF2B5EF4-FFF2-40B4-BE49-F238E27FC236}">
-                <a16:creationId xmlns:a16="http://schemas.microsoft.com/office/drawing/2014/main" id="{DC8FD388-2794-4262-9B6C-F4E1F226DB38}"/>
+                <a16:creationId xmlns:a16="http://schemas.microsoft.com/office/drawing/2014/main" id="{3C520537-F12D-4A5E-A8A2-15FA307F9727}"/>
               </a:ext>
             </a:extLst>
           </p:cNvPr>
@@ -7434,7 +7434,7 @@
           <p:cNvPr id="19" name="">
             <a:extLst xmlns:a="http://schemas.openxmlformats.org/drawingml/2006/main">
               <a:ext uri="{FF2B5EF4-FFF2-40B4-BE49-F238E27FC236}">
-                <a16:creationId xmlns:a16="http://schemas.microsoft.com/office/drawing/2014/main" id="{21F212CB-F510-41CA-B360-6438ABE535CA}"/>
+                <a16:creationId xmlns:a16="http://schemas.microsoft.com/office/drawing/2014/main" id="{F14C4F64-A55A-455A-AD6A-8DA443138BCD}"/>
               </a:ext>
             </a:extLst>
           </p:cNvPr>
@@ -7469,7 +7469,7 @@
           <p:cNvPr id="20" name="">
             <a:extLst xmlns:a="http://schemas.openxmlformats.org/drawingml/2006/main">
               <a:ext uri="{FF2B5EF4-FFF2-40B4-BE49-F238E27FC236}">
-                <a16:creationId xmlns:a16="http://schemas.microsoft.com/office/drawing/2014/main" id="{33D6972B-01B0-4071-981C-0926EB4C1EBF}"/>
+                <a16:creationId xmlns:a16="http://schemas.microsoft.com/office/drawing/2014/main" id="{1022DDFE-528D-47AE-BE90-FA98694744B3}"/>
               </a:ext>
             </a:extLst>
           </p:cNvPr>
@@ -7527,7 +7527,7 @@
           <p:cNvPr id="21" name="">
             <a:extLst xmlns:a="http://schemas.openxmlformats.org/drawingml/2006/main">
               <a:ext uri="{FF2B5EF4-FFF2-40B4-BE49-F238E27FC236}">
-                <a16:creationId xmlns:a16="http://schemas.microsoft.com/office/drawing/2014/main" id="{EFAC4CE2-E515-446D-97AB-20050627286A}"/>
+                <a16:creationId xmlns:a16="http://schemas.microsoft.com/office/drawing/2014/main" id="{DBF257CD-9F35-4C3E-8231-AA5396D5DD4B}"/>
               </a:ext>
             </a:extLst>
           </p:cNvPr>
@@ -7617,7 +7617,7 @@
     </p:spTree>
     <p:extLst>
       <p:ext uri="{BB962C8B-B14F-4D97-AF65-F5344CB8AC3E}">
-        <p14:creationId xmlns:p14="http://schemas.microsoft.com/office/powerpoint/2010/main" val="1044617621"/>
+        <p14:creationId xmlns:p14="http://schemas.microsoft.com/office/powerpoint/2010/main" val="989744108"/>
       </p:ext>
     </p:extLst>
   </p:cSld>
@@ -7630,7 +7630,7 @@
     <p:bg>
       <p:bgPr>
         <a:solidFill xmlns:a="http://schemas.openxmlformats.org/drawingml/2006/main">
-          <a:srgbClr val="0E1B3E"/>
+          <a:srgbClr val="070F26"/>
         </a:solidFill>
       </p:bgPr>
     </p:bg>
@@ -7648,7 +7648,7 @@
           <p:cNvPr id="1" name="">
             <a:extLst xmlns:a="http://schemas.openxmlformats.org/drawingml/2006/main">
               <a:ext uri="{FF2B5EF4-FFF2-40B4-BE49-F238E27FC236}">
-                <a16:creationId xmlns:a16="http://schemas.microsoft.com/office/drawing/2014/main" id="{3C30D040-4160-4A21-94FC-BCE22D77922E}"/>
+                <a16:creationId xmlns:a16="http://schemas.microsoft.com/office/drawing/2014/main" id="{29CD1A71-F844-41D6-8E5D-BAC2B6DB5B7C}"/>
               </a:ext>
             </a:extLst>
           </p:cNvPr>
@@ -7666,7 +7666,7 @@
             <a:avLst/>
           </a:prstGeom>
           <a:solidFill xmlns:a="http://schemas.openxmlformats.org/drawingml/2006/main">
-            <a:srgbClr val="0E1B3E"/>
+            <a:srgbClr val="070F26"/>
           </a:solidFill>
           <a:ln xmlns:a="http://schemas.openxmlformats.org/drawingml/2006/main" w="0">
             <a:solidFill>
@@ -7687,7 +7687,7 @@
           <p:nvPr/>
         </p:nvPicPr>
         <p:blipFill>
-          <a:blip xmlns:r="http://schemas.openxmlformats.org/officeDocument/2006/relationships" xmlns:a="http://schemas.openxmlformats.org/drawingml/2006/main" r:embed="Rcd577e3a91e043f6"/>
+          <a:blip xmlns:r="http://schemas.openxmlformats.org/officeDocument/2006/relationships" xmlns:a="http://schemas.openxmlformats.org/drawingml/2006/main" r:embed="R121a369958ac4f94"/>
           <a:stretch xmlns:a="http://schemas.openxmlformats.org/drawingml/2006/main"/>
         </p:blipFill>
         <p:spPr>
@@ -7705,7 +7705,7 @@
           <p:cNvPr id="3" name="">
             <a:extLst xmlns:a="http://schemas.openxmlformats.org/drawingml/2006/main">
               <a:ext uri="{FF2B5EF4-FFF2-40B4-BE49-F238E27FC236}">
-                <a16:creationId xmlns:a16="http://schemas.microsoft.com/office/drawing/2014/main" id="{4F09FD01-C87E-4281-8373-D323CCA30BB0}"/>
+                <a16:creationId xmlns:a16="http://schemas.microsoft.com/office/drawing/2014/main" id="{117EB7D3-E1F3-4C49-BD70-12815DEECF53}"/>
               </a:ext>
             </a:extLst>
           </p:cNvPr>
@@ -7763,7 +7763,7 @@
           <p:cNvPr id="4" name="">
             <a:extLst xmlns:a="http://schemas.openxmlformats.org/drawingml/2006/main">
               <a:ext uri="{FF2B5EF4-FFF2-40B4-BE49-F238E27FC236}">
-                <a16:creationId xmlns:a16="http://schemas.microsoft.com/office/drawing/2014/main" id="{CEBB0056-B740-46E2-A940-C980DD56AAD6}"/>
+                <a16:creationId xmlns:a16="http://schemas.microsoft.com/office/drawing/2014/main" id="{68B7484F-9C26-423D-BFF5-637548FD2A32}"/>
               </a:ext>
             </a:extLst>
           </p:cNvPr>
@@ -7821,7 +7821,7 @@
           <p:cNvPr id="5" name="">
             <a:extLst xmlns:a="http://schemas.openxmlformats.org/drawingml/2006/main">
               <a:ext uri="{FF2B5EF4-FFF2-40B4-BE49-F238E27FC236}">
-                <a16:creationId xmlns:a16="http://schemas.microsoft.com/office/drawing/2014/main" id="{767281BC-47D9-42E0-B5A7-50BBEDED23AE}"/>
+                <a16:creationId xmlns:a16="http://schemas.microsoft.com/office/drawing/2014/main" id="{B2DAAC22-4676-46C0-9D28-812434D344AD}"/>
               </a:ext>
             </a:extLst>
           </p:cNvPr>
@@ -7883,7 +7883,7 @@
           <p:nvPr/>
         </p:nvPicPr>
         <p:blipFill>
-          <a:blip xmlns:r="http://schemas.openxmlformats.org/officeDocument/2006/relationships" xmlns:a="http://schemas.openxmlformats.org/drawingml/2006/main" r:embed="R2018677637784661"/>
+          <a:blip xmlns:r="http://schemas.openxmlformats.org/officeDocument/2006/relationships" xmlns:a="http://schemas.openxmlformats.org/drawingml/2006/main" r:embed="Rc694557064064a4a"/>
           <a:stretch xmlns:a="http://schemas.openxmlformats.org/drawingml/2006/main"/>
         </p:blipFill>
         <p:spPr>
@@ -7901,7 +7901,7 @@
           <p:cNvPr id="7" name="">
             <a:extLst xmlns:a="http://schemas.openxmlformats.org/drawingml/2006/main">
               <a:ext uri="{FF2B5EF4-FFF2-40B4-BE49-F238E27FC236}">
-                <a16:creationId xmlns:a16="http://schemas.microsoft.com/office/drawing/2014/main" id="{542BFEDB-A9A5-4FA4-8826-2D78E3C41FD8}"/>
+                <a16:creationId xmlns:a16="http://schemas.microsoft.com/office/drawing/2014/main" id="{174770DD-DBDC-4001-A1B7-126B7E78B821}"/>
               </a:ext>
             </a:extLst>
           </p:cNvPr>
@@ -7959,7 +7959,7 @@
           <p:cNvPr id="8" name="">
             <a:extLst xmlns:a="http://schemas.openxmlformats.org/drawingml/2006/main">
               <a:ext uri="{FF2B5EF4-FFF2-40B4-BE49-F238E27FC236}">
-                <a16:creationId xmlns:a16="http://schemas.microsoft.com/office/drawing/2014/main" id="{D2880097-AA6E-47A0-A548-547180DDF44F}"/>
+                <a16:creationId xmlns:a16="http://schemas.microsoft.com/office/drawing/2014/main" id="{D443F671-09D1-4183-80F1-F8A4B0FC820D}"/>
               </a:ext>
             </a:extLst>
           </p:cNvPr>
@@ -8015,7 +8015,7 @@
     </p:spTree>
     <p:extLst>
       <p:ext uri="{BB962C8B-B14F-4D97-AF65-F5344CB8AC3E}">
-        <p14:creationId xmlns:p14="http://schemas.microsoft.com/office/powerpoint/2010/main" val="1514161800"/>
+        <p14:creationId xmlns:p14="http://schemas.microsoft.com/office/powerpoint/2010/main" val="1349512731"/>
       </p:ext>
     </p:extLst>
   </p:cSld>
@@ -8046,7 +8046,7 @@
           <p:cNvPr id="1" name="">
             <a:extLst xmlns:a="http://schemas.openxmlformats.org/drawingml/2006/main">
               <a:ext uri="{FF2B5EF4-FFF2-40B4-BE49-F238E27FC236}">
-                <a16:creationId xmlns:a16="http://schemas.microsoft.com/office/drawing/2014/main" id="{6840B5A4-E74E-49BE-9295-0F7C9594F4ED}"/>
+                <a16:creationId xmlns:a16="http://schemas.microsoft.com/office/drawing/2014/main" id="{3DF8144C-CDF2-406E-8921-655D190C049E}"/>
               </a:ext>
             </a:extLst>
           </p:cNvPr>
@@ -8085,7 +8085,7 @@
           <p:nvPr/>
         </p:nvPicPr>
         <p:blipFill>
-          <a:blip xmlns:r="http://schemas.openxmlformats.org/officeDocument/2006/relationships" xmlns:a="http://schemas.openxmlformats.org/drawingml/2006/main" r:embed="R71df320468184536"/>
+          <a:blip xmlns:r="http://schemas.openxmlformats.org/officeDocument/2006/relationships" xmlns:a="http://schemas.openxmlformats.org/drawingml/2006/main" r:embed="R52ca78412de942d0"/>
           <a:stretch xmlns:a="http://schemas.openxmlformats.org/drawingml/2006/main"/>
         </p:blipFill>
         <p:spPr>
@@ -8103,7 +8103,7 @@
           <p:cNvPr id="3" name="">
             <a:extLst xmlns:a="http://schemas.openxmlformats.org/drawingml/2006/main">
               <a:ext uri="{FF2B5EF4-FFF2-40B4-BE49-F238E27FC236}">
-                <a16:creationId xmlns:a16="http://schemas.microsoft.com/office/drawing/2014/main" id="{50344D39-D38A-4A09-A876-255BCBD28AFC}"/>
+                <a16:creationId xmlns:a16="http://schemas.microsoft.com/office/drawing/2014/main" id="{4F5B1881-3ABD-43D3-A031-1F2F8F77F158}"/>
               </a:ext>
             </a:extLst>
           </p:cNvPr>
@@ -8141,14 +8141,14 @@
             <a:pPr algn="r">
               <a:defRPr sz="825" b="1">
                 <a:solidFill>
-                  <a:srgbClr val="0E1B3E"/>
+                  <a:srgbClr val="070F26"/>
                 </a:solidFill>
               </a:defRPr>
             </a:pPr>
             <a:r>
               <a:rPr sz="825" b="1">
                 <a:solidFill>
-                  <a:srgbClr val="0E1B3E"/>
+                  <a:srgbClr val="070F26"/>
                 </a:solidFill>
               </a:rPr>
               <a:t>NTT DATA UNIVERSITY</a:t>
@@ -8161,7 +8161,7 @@
           <p:cNvPr id="4" name="">
             <a:extLst xmlns:a="http://schemas.openxmlformats.org/drawingml/2006/main">
               <a:ext uri="{FF2B5EF4-FFF2-40B4-BE49-F238E27FC236}">
-                <a16:creationId xmlns:a16="http://schemas.microsoft.com/office/drawing/2014/main" id="{1D6D1F0E-8B3F-4101-B3B2-18B0B2536770}"/>
+                <a16:creationId xmlns:a16="http://schemas.microsoft.com/office/drawing/2014/main" id="{CB76211C-08BF-4AC4-87A1-3CC54DA35DC1}"/>
               </a:ext>
             </a:extLst>
           </p:cNvPr>
@@ -8219,7 +8219,7 @@
           <p:cNvPr id="5" name="">
             <a:extLst xmlns:a="http://schemas.openxmlformats.org/drawingml/2006/main">
               <a:ext uri="{FF2B5EF4-FFF2-40B4-BE49-F238E27FC236}">
-                <a16:creationId xmlns:a16="http://schemas.microsoft.com/office/drawing/2014/main" id="{1A5C2B4B-D41B-4ED9-9CCB-D0DF031D4E69}"/>
+                <a16:creationId xmlns:a16="http://schemas.microsoft.com/office/drawing/2014/main" id="{6F858175-1C21-4579-A42C-5D2F07C5F5B5}"/>
               </a:ext>
             </a:extLst>
           </p:cNvPr>
@@ -8277,7 +8277,7 @@
           <p:cNvPr id="6" name="">
             <a:extLst xmlns:a="http://schemas.openxmlformats.org/drawingml/2006/main">
               <a:ext uri="{FF2B5EF4-FFF2-40B4-BE49-F238E27FC236}">
-                <a16:creationId xmlns:a16="http://schemas.microsoft.com/office/drawing/2014/main" id="{EBA6F760-4C27-4AC8-AEA8-53B70878ADDF}"/>
+                <a16:creationId xmlns:a16="http://schemas.microsoft.com/office/drawing/2014/main" id="{FE8C8AB5-CAC4-4A79-AFD7-16FA275066B1}"/>
               </a:ext>
             </a:extLst>
           </p:cNvPr>
@@ -8315,14 +8315,14 @@
             <a:pPr algn="r">
               <a:defRPr sz="675" b="1">
                 <a:solidFill>
-                  <a:srgbClr val="0E1B3E"/>
+                  <a:srgbClr val="070F26"/>
                 </a:solidFill>
               </a:defRPr>
             </a:pPr>
             <a:r>
               <a:rPr sz="675" b="1">
                 <a:solidFill>
-                  <a:srgbClr val="0E1B3E"/>
+                  <a:srgbClr val="070F26"/>
                 </a:solidFill>
               </a:rPr>
               <a:t>NTT DATA UNIVERSITY</a:t>
@@ -8335,7 +8335,7 @@
           <p:cNvPr id="7" name="">
             <a:extLst xmlns:a="http://schemas.openxmlformats.org/drawingml/2006/main">
               <a:ext uri="{FF2B5EF4-FFF2-40B4-BE49-F238E27FC236}">
-                <a16:creationId xmlns:a16="http://schemas.microsoft.com/office/drawing/2014/main" id="{DACD2861-4526-45B2-8FD8-BC00E687A983}"/>
+                <a16:creationId xmlns:a16="http://schemas.microsoft.com/office/drawing/2014/main" id="{B8B9C6DF-F5E4-4295-BF49-D7C7D7587094}"/>
               </a:ext>
             </a:extLst>
           </p:cNvPr>
@@ -8393,7 +8393,7 @@
           <p:cNvPr id="8" name="">
             <a:extLst xmlns:a="http://schemas.openxmlformats.org/drawingml/2006/main">
               <a:ext uri="{FF2B5EF4-FFF2-40B4-BE49-F238E27FC236}">
-                <a16:creationId xmlns:a16="http://schemas.microsoft.com/office/drawing/2014/main" id="{3B0B39E9-F162-40F8-8A3F-D8C9ED40B88C}"/>
+                <a16:creationId xmlns:a16="http://schemas.microsoft.com/office/drawing/2014/main" id="{9D37880B-C602-44DE-A86E-6926FCA3CBA1}"/>
               </a:ext>
             </a:extLst>
           </p:cNvPr>
@@ -8431,14 +8431,14 @@
             <a:pPr algn="l">
               <a:defRPr sz="2400" b="0">
                 <a:solidFill>
-                  <a:srgbClr val="0E1B3E"/>
+                  <a:srgbClr val="070F26"/>
                 </a:solidFill>
               </a:defRPr>
             </a:pPr>
             <a:r>
               <a:rPr sz="2400" b="0">
                 <a:solidFill>
-                  <a:srgbClr val="0E1B3E"/>
+                  <a:srgbClr val="070F26"/>
                 </a:solidFill>
               </a:rPr>
               <a:t>Da teoria ao pipeline robusto</a:t>
@@ -8451,7 +8451,7 @@
           <p:cNvPr id="9" name="">
             <a:extLst xmlns:a="http://schemas.openxmlformats.org/drawingml/2006/main">
               <a:ext uri="{FF2B5EF4-FFF2-40B4-BE49-F238E27FC236}">
-                <a16:creationId xmlns:a16="http://schemas.microsoft.com/office/drawing/2014/main" id="{FEDD457E-0D1B-459D-AC60-4F8DD5DEA5E1}"/>
+                <a16:creationId xmlns:a16="http://schemas.microsoft.com/office/drawing/2014/main" id="{FCD6DC8B-BB69-4BA6-B10F-722B4A156289}"/>
               </a:ext>
             </a:extLst>
           </p:cNvPr>
@@ -8509,7 +8509,7 @@
           <p:cNvPr id="10" name="">
             <a:extLst xmlns:a="http://schemas.openxmlformats.org/drawingml/2006/main">
               <a:ext uri="{FF2B5EF4-FFF2-40B4-BE49-F238E27FC236}">
-                <a16:creationId xmlns:a16="http://schemas.microsoft.com/office/drawing/2014/main" id="{D1B0E628-2788-4FAD-8927-B88AD98A5154}"/>
+                <a16:creationId xmlns:a16="http://schemas.microsoft.com/office/drawing/2014/main" id="{8B299F47-9EDC-4F2A-8784-DB16B95E7116}"/>
               </a:ext>
             </a:extLst>
           </p:cNvPr>
@@ -8542,7 +8542,7 @@
           <p:cNvPr id="11" name="">
             <a:extLst xmlns:a="http://schemas.openxmlformats.org/drawingml/2006/main">
               <a:ext uri="{FF2B5EF4-FFF2-40B4-BE49-F238E27FC236}">
-                <a16:creationId xmlns:a16="http://schemas.microsoft.com/office/drawing/2014/main" id="{3E7AA96F-9846-4116-8C23-C4E1830AD856}"/>
+                <a16:creationId xmlns:a16="http://schemas.microsoft.com/office/drawing/2014/main" id="{901F03E3-A5A7-42D3-8E53-43F0D64982C4}"/>
               </a:ext>
             </a:extLst>
           </p:cNvPr>
@@ -8577,7 +8577,7 @@
           <p:cNvPr id="12" name="">
             <a:extLst xmlns:a="http://schemas.openxmlformats.org/drawingml/2006/main">
               <a:ext uri="{FF2B5EF4-FFF2-40B4-BE49-F238E27FC236}">
-                <a16:creationId xmlns:a16="http://schemas.microsoft.com/office/drawing/2014/main" id="{B1369221-6D21-498D-B283-992D50ABD7A4}"/>
+                <a16:creationId xmlns:a16="http://schemas.microsoft.com/office/drawing/2014/main" id="{50F7DD49-D950-40B2-B660-32B504346E8E}"/>
               </a:ext>
             </a:extLst>
           </p:cNvPr>
@@ -8635,7 +8635,7 @@
           <p:cNvPr id="13" name="">
             <a:extLst xmlns:a="http://schemas.openxmlformats.org/drawingml/2006/main">
               <a:ext uri="{FF2B5EF4-FFF2-40B4-BE49-F238E27FC236}">
-                <a16:creationId xmlns:a16="http://schemas.microsoft.com/office/drawing/2014/main" id="{36A7782B-A22E-4F50-87F0-5C4A0A2489A0}"/>
+                <a16:creationId xmlns:a16="http://schemas.microsoft.com/office/drawing/2014/main" id="{CAB4B44E-AF42-4F28-AE05-95322A1F8834}"/>
               </a:ext>
             </a:extLst>
           </p:cNvPr>
@@ -8727,7 +8727,7 @@
           <p:cNvPr id="14" name="">
             <a:extLst xmlns:a="http://schemas.openxmlformats.org/drawingml/2006/main">
               <a:ext uri="{FF2B5EF4-FFF2-40B4-BE49-F238E27FC236}">
-                <a16:creationId xmlns:a16="http://schemas.microsoft.com/office/drawing/2014/main" id="{5D0D790B-2E05-445D-830A-283626A46DBF}"/>
+                <a16:creationId xmlns:a16="http://schemas.microsoft.com/office/drawing/2014/main" id="{5D7EC0F1-8B11-4479-91D2-AFD16E7E9F36}"/>
               </a:ext>
             </a:extLst>
           </p:cNvPr>
@@ -8760,7 +8760,7 @@
           <p:cNvPr id="15" name="">
             <a:extLst xmlns:a="http://schemas.openxmlformats.org/drawingml/2006/main">
               <a:ext uri="{FF2B5EF4-FFF2-40B4-BE49-F238E27FC236}">
-                <a16:creationId xmlns:a16="http://schemas.microsoft.com/office/drawing/2014/main" id="{662E0D9B-77A7-407B-933B-EA3EBFCBE976}"/>
+                <a16:creationId xmlns:a16="http://schemas.microsoft.com/office/drawing/2014/main" id="{54F7EC50-0734-4E57-9C7D-D20FE6618D57}"/>
               </a:ext>
             </a:extLst>
           </p:cNvPr>
@@ -8795,7 +8795,7 @@
           <p:cNvPr id="16" name="">
             <a:extLst xmlns:a="http://schemas.openxmlformats.org/drawingml/2006/main">
               <a:ext uri="{FF2B5EF4-FFF2-40B4-BE49-F238E27FC236}">
-                <a16:creationId xmlns:a16="http://schemas.microsoft.com/office/drawing/2014/main" id="{C531C16D-5CA6-44B9-A0B6-5ABD317AB393}"/>
+                <a16:creationId xmlns:a16="http://schemas.microsoft.com/office/drawing/2014/main" id="{0094F15C-6823-4029-B905-F6645884E9A1}"/>
               </a:ext>
             </a:extLst>
           </p:cNvPr>
@@ -8853,7 +8853,7 @@
           <p:cNvPr id="17" name="">
             <a:extLst xmlns:a="http://schemas.openxmlformats.org/drawingml/2006/main">
               <a:ext uri="{FF2B5EF4-FFF2-40B4-BE49-F238E27FC236}">
-                <a16:creationId xmlns:a16="http://schemas.microsoft.com/office/drawing/2014/main" id="{E488870A-45F1-45BA-9E9F-9E78E952C0BF}"/>
+                <a16:creationId xmlns:a16="http://schemas.microsoft.com/office/drawing/2014/main" id="{4006D659-B038-4D9E-89FD-CD866C513DEE}"/>
               </a:ext>
             </a:extLst>
           </p:cNvPr>
@@ -8945,7 +8945,7 @@
           <p:cNvPr id="18" name="">
             <a:extLst xmlns:a="http://schemas.openxmlformats.org/drawingml/2006/main">
               <a:ext uri="{FF2B5EF4-FFF2-40B4-BE49-F238E27FC236}">
-                <a16:creationId xmlns:a16="http://schemas.microsoft.com/office/drawing/2014/main" id="{0A4F2A35-7A95-4399-8FFD-159D06829EC3}"/>
+                <a16:creationId xmlns:a16="http://schemas.microsoft.com/office/drawing/2014/main" id="{47DFB7C9-6D92-4566-BCDC-6A1AFE6C35B1}"/>
               </a:ext>
             </a:extLst>
           </p:cNvPr>
@@ -8978,7 +8978,7 @@
           <p:cNvPr id="19" name="">
             <a:extLst xmlns:a="http://schemas.openxmlformats.org/drawingml/2006/main">
               <a:ext uri="{FF2B5EF4-FFF2-40B4-BE49-F238E27FC236}">
-                <a16:creationId xmlns:a16="http://schemas.microsoft.com/office/drawing/2014/main" id="{DB5D2259-CACB-424F-9773-8DD3B41A2E13}"/>
+                <a16:creationId xmlns:a16="http://schemas.microsoft.com/office/drawing/2014/main" id="{6E24D61B-C566-4C33-B2E0-3B77721B8300}"/>
               </a:ext>
             </a:extLst>
           </p:cNvPr>
@@ -9013,7 +9013,7 @@
           <p:cNvPr id="20" name="">
             <a:extLst xmlns:a="http://schemas.openxmlformats.org/drawingml/2006/main">
               <a:ext uri="{FF2B5EF4-FFF2-40B4-BE49-F238E27FC236}">
-                <a16:creationId xmlns:a16="http://schemas.microsoft.com/office/drawing/2014/main" id="{F80D16CE-0E0D-4761-BBDD-3B053C1AF9A6}"/>
+                <a16:creationId xmlns:a16="http://schemas.microsoft.com/office/drawing/2014/main" id="{1B2D915D-3A78-4A4A-A0D3-726FAFC79641}"/>
               </a:ext>
             </a:extLst>
           </p:cNvPr>
@@ -9071,7 +9071,7 @@
           <p:cNvPr id="21" name="">
             <a:extLst xmlns:a="http://schemas.openxmlformats.org/drawingml/2006/main">
               <a:ext uri="{FF2B5EF4-FFF2-40B4-BE49-F238E27FC236}">
-                <a16:creationId xmlns:a16="http://schemas.microsoft.com/office/drawing/2014/main" id="{F9448615-6787-44D9-A8F7-B78E837CB277}"/>
+                <a16:creationId xmlns:a16="http://schemas.microsoft.com/office/drawing/2014/main" id="{188E93DD-41A7-4AD5-B511-5EFEE9BCD1E8}"/>
               </a:ext>
             </a:extLst>
           </p:cNvPr>
@@ -9161,7 +9161,7 @@
     </p:spTree>
     <p:extLst>
       <p:ext uri="{BB962C8B-B14F-4D97-AF65-F5344CB8AC3E}">
-        <p14:creationId xmlns:p14="http://schemas.microsoft.com/office/powerpoint/2010/main" val="1024520765"/>
+        <p14:creationId xmlns:p14="http://schemas.microsoft.com/office/powerpoint/2010/main" val="33302732"/>
       </p:ext>
     </p:extLst>
   </p:cSld>
@@ -9174,7 +9174,7 @@
     <p:bg>
       <p:bgPr>
         <a:solidFill xmlns:a="http://schemas.openxmlformats.org/drawingml/2006/main">
-          <a:srgbClr val="0E1B3E"/>
+          <a:srgbClr val="070F26"/>
         </a:solidFill>
       </p:bgPr>
     </p:bg>
@@ -9192,7 +9192,7 @@
           <p:cNvPr id="1" name="">
             <a:extLst xmlns:a="http://schemas.openxmlformats.org/drawingml/2006/main">
               <a:ext uri="{FF2B5EF4-FFF2-40B4-BE49-F238E27FC236}">
-                <a16:creationId xmlns:a16="http://schemas.microsoft.com/office/drawing/2014/main" id="{42E32C2C-C053-41BA-BFCA-CFC352D40DE4}"/>
+                <a16:creationId xmlns:a16="http://schemas.microsoft.com/office/drawing/2014/main" id="{1BF1D4BD-3FA5-469D-B7BC-B67A57C5A2F3}"/>
               </a:ext>
             </a:extLst>
           </p:cNvPr>
@@ -9210,7 +9210,7 @@
             <a:avLst/>
           </a:prstGeom>
           <a:solidFill xmlns:a="http://schemas.openxmlformats.org/drawingml/2006/main">
-            <a:srgbClr val="0E1B3E"/>
+            <a:srgbClr val="070F26"/>
           </a:solidFill>
           <a:ln xmlns:a="http://schemas.openxmlformats.org/drawingml/2006/main" w="0">
             <a:solidFill>
@@ -9231,7 +9231,7 @@
           <p:nvPr/>
         </p:nvPicPr>
         <p:blipFill>
-          <a:blip xmlns:r="http://schemas.openxmlformats.org/officeDocument/2006/relationships" xmlns:a="http://schemas.openxmlformats.org/drawingml/2006/main" r:embed="R3a78ea8a67424fad"/>
+          <a:blip xmlns:r="http://schemas.openxmlformats.org/officeDocument/2006/relationships" xmlns:a="http://schemas.openxmlformats.org/drawingml/2006/main" r:embed="R00f3eb8e547b4cb0"/>
           <a:stretch xmlns:a="http://schemas.openxmlformats.org/drawingml/2006/main"/>
         </p:blipFill>
         <p:spPr>
@@ -9249,7 +9249,7 @@
           <p:cNvPr id="3" name="">
             <a:extLst xmlns:a="http://schemas.openxmlformats.org/drawingml/2006/main">
               <a:ext uri="{FF2B5EF4-FFF2-40B4-BE49-F238E27FC236}">
-                <a16:creationId xmlns:a16="http://schemas.microsoft.com/office/drawing/2014/main" id="{8954A356-3019-4F75-9939-8B8FC2A4EA1D}"/>
+                <a16:creationId xmlns:a16="http://schemas.microsoft.com/office/drawing/2014/main" id="{35BEFEA9-2B37-41E8-9A69-611493A0019A}"/>
               </a:ext>
             </a:extLst>
           </p:cNvPr>
@@ -9307,7 +9307,7 @@
           <p:cNvPr id="4" name="">
             <a:extLst xmlns:a="http://schemas.openxmlformats.org/drawingml/2006/main">
               <a:ext uri="{FF2B5EF4-FFF2-40B4-BE49-F238E27FC236}">
-                <a16:creationId xmlns:a16="http://schemas.microsoft.com/office/drawing/2014/main" id="{BD0A437A-FC9D-4568-A4F1-192234BAD1AE}"/>
+                <a16:creationId xmlns:a16="http://schemas.microsoft.com/office/drawing/2014/main" id="{28516491-05E1-4C20-957C-76B6FC9739D0}"/>
               </a:ext>
             </a:extLst>
           </p:cNvPr>
@@ -9365,7 +9365,7 @@
           <p:cNvPr id="5" name="">
             <a:extLst xmlns:a="http://schemas.openxmlformats.org/drawingml/2006/main">
               <a:ext uri="{FF2B5EF4-FFF2-40B4-BE49-F238E27FC236}">
-                <a16:creationId xmlns:a16="http://schemas.microsoft.com/office/drawing/2014/main" id="{C7DECCB6-E251-45F7-A77D-FE31AA15FAEB}"/>
+                <a16:creationId xmlns:a16="http://schemas.microsoft.com/office/drawing/2014/main" id="{8622FE43-7BEE-4AE0-84E9-99ED4E0C0F9A}"/>
               </a:ext>
             </a:extLst>
           </p:cNvPr>
@@ -9423,7 +9423,7 @@
           <p:cNvPr id="6" name="">
             <a:extLst xmlns:a="http://schemas.openxmlformats.org/drawingml/2006/main">
               <a:ext uri="{FF2B5EF4-FFF2-40B4-BE49-F238E27FC236}">
-                <a16:creationId xmlns:a16="http://schemas.microsoft.com/office/drawing/2014/main" id="{192B8877-6FDE-45E8-BF24-865B8811EF6B}"/>
+                <a16:creationId xmlns:a16="http://schemas.microsoft.com/office/drawing/2014/main" id="{4C16A576-903F-4E99-8CAE-66075EFAAA4F}"/>
               </a:ext>
             </a:extLst>
           </p:cNvPr>
@@ -9485,13 +9485,13 @@
           <p:nvPr/>
         </p:nvPicPr>
         <p:blipFill>
-          <a:blip xmlns:r="http://schemas.openxmlformats.org/officeDocument/2006/relationships" xmlns:a="http://schemas.openxmlformats.org/drawingml/2006/main" r:embed="R41f484ad239a4d29"/>
+          <a:blip xmlns:r="http://schemas.openxmlformats.org/officeDocument/2006/relationships" xmlns:a="http://schemas.openxmlformats.org/drawingml/2006/main" r:embed="Rc205125152f04285"/>
           <a:stretch xmlns:a="http://schemas.openxmlformats.org/drawingml/2006/main"/>
         </p:blipFill>
         <p:spPr>
           <a:xfrm xmlns:a="http://schemas.openxmlformats.org/drawingml/2006/main">
-            <a:off x="476250" y="1257300"/>
-            <a:ext cx="2667000" cy="4533900"/>
+            <a:off x="0" y="1746250"/>
+            <a:ext cx="2667000" cy="3556000"/>
           </a:xfrm>
           <a:prstGeom xmlns:a="http://schemas.openxmlformats.org/drawingml/2006/main" prst="rect">
             <a:avLst/>
@@ -9503,7 +9503,7 @@
           <p:cNvPr id="8" name="">
             <a:extLst xmlns:a="http://schemas.openxmlformats.org/drawingml/2006/main">
               <a:ext uri="{FF2B5EF4-FFF2-40B4-BE49-F238E27FC236}">
-                <a16:creationId xmlns:a16="http://schemas.microsoft.com/office/drawing/2014/main" id="{29AA153B-F530-4426-A735-A47D747C69AD}"/>
+                <a16:creationId xmlns:a16="http://schemas.microsoft.com/office/drawing/2014/main" id="{5B42A02F-0376-4F21-942B-5D1B57CD87C5}"/>
               </a:ext>
             </a:extLst>
           </p:cNvPr>
@@ -9561,7 +9561,7 @@
           <p:cNvPr id="9" name="">
             <a:extLst xmlns:a="http://schemas.openxmlformats.org/drawingml/2006/main">
               <a:ext uri="{FF2B5EF4-FFF2-40B4-BE49-F238E27FC236}">
-                <a16:creationId xmlns:a16="http://schemas.microsoft.com/office/drawing/2014/main" id="{7F298DA3-08F8-4D24-8D49-EAA294914584}"/>
+                <a16:creationId xmlns:a16="http://schemas.microsoft.com/office/drawing/2014/main" id="{FCBA81F2-8EC0-4393-A048-E788602FD7BF}"/>
               </a:ext>
             </a:extLst>
           </p:cNvPr>
@@ -9619,7 +9619,7 @@
           <p:cNvPr id="10" name="">
             <a:extLst xmlns:a="http://schemas.openxmlformats.org/drawingml/2006/main">
               <a:ext uri="{FF2B5EF4-FFF2-40B4-BE49-F238E27FC236}">
-                <a16:creationId xmlns:a16="http://schemas.microsoft.com/office/drawing/2014/main" id="{4EA77030-F123-48FB-B76C-245B891CCC1B}"/>
+                <a16:creationId xmlns:a16="http://schemas.microsoft.com/office/drawing/2014/main" id="{6F8F9BAF-487F-4813-A08D-6B108BC95AC6}"/>
               </a:ext>
             </a:extLst>
           </p:cNvPr>
@@ -9675,7 +9675,7 @@
     </p:spTree>
     <p:extLst>
       <p:ext uri="{BB962C8B-B14F-4D97-AF65-F5344CB8AC3E}">
-        <p14:creationId xmlns:p14="http://schemas.microsoft.com/office/powerpoint/2010/main" val="1317395438"/>
+        <p14:creationId xmlns:p14="http://schemas.microsoft.com/office/powerpoint/2010/main" val="1365515680"/>
       </p:ext>
     </p:extLst>
   </p:cSld>
@@ -9706,7 +9706,7 @@
           <p:cNvPr id="1" name="">
             <a:extLst xmlns:a="http://schemas.openxmlformats.org/drawingml/2006/main">
               <a:ext uri="{FF2B5EF4-FFF2-40B4-BE49-F238E27FC236}">
-                <a16:creationId xmlns:a16="http://schemas.microsoft.com/office/drawing/2014/main" id="{495FDFE6-1E6B-40C5-B801-9942A6222D8B}"/>
+                <a16:creationId xmlns:a16="http://schemas.microsoft.com/office/drawing/2014/main" id="{D95DF5CF-7E18-4652-93B5-3B9E79FF6304}"/>
               </a:ext>
             </a:extLst>
           </p:cNvPr>
@@ -9745,7 +9745,7 @@
           <p:nvPr/>
         </p:nvPicPr>
         <p:blipFill>
-          <a:blip xmlns:r="http://schemas.openxmlformats.org/officeDocument/2006/relationships" xmlns:a="http://schemas.openxmlformats.org/drawingml/2006/main" r:embed="R2f061bbd1a664968"/>
+          <a:blip xmlns:r="http://schemas.openxmlformats.org/officeDocument/2006/relationships" xmlns:a="http://schemas.openxmlformats.org/drawingml/2006/main" r:embed="Rdd5e04fea87b4b99"/>
           <a:stretch xmlns:a="http://schemas.openxmlformats.org/drawingml/2006/main"/>
         </p:blipFill>
         <p:spPr>
@@ -9763,7 +9763,7 @@
           <p:cNvPr id="3" name="">
             <a:extLst xmlns:a="http://schemas.openxmlformats.org/drawingml/2006/main">
               <a:ext uri="{FF2B5EF4-FFF2-40B4-BE49-F238E27FC236}">
-                <a16:creationId xmlns:a16="http://schemas.microsoft.com/office/drawing/2014/main" id="{CA016487-F2E0-405B-9346-7A31695C0885}"/>
+                <a16:creationId xmlns:a16="http://schemas.microsoft.com/office/drawing/2014/main" id="{4710C8F7-8C49-4FDB-8F88-C5255FFB9890}"/>
               </a:ext>
             </a:extLst>
           </p:cNvPr>
@@ -9801,14 +9801,14 @@
             <a:pPr algn="r">
               <a:defRPr sz="825" b="1">
                 <a:solidFill>
-                  <a:srgbClr val="0E1B3E"/>
+                  <a:srgbClr val="070F26"/>
                 </a:solidFill>
               </a:defRPr>
             </a:pPr>
             <a:r>
               <a:rPr sz="825" b="1">
                 <a:solidFill>
-                  <a:srgbClr val="0E1B3E"/>
+                  <a:srgbClr val="070F26"/>
                 </a:solidFill>
               </a:rPr>
               <a:t>NTT DATA UNIVERSITY</a:t>
@@ -9821,7 +9821,7 @@
           <p:cNvPr id="4" name="">
             <a:extLst xmlns:a="http://schemas.openxmlformats.org/drawingml/2006/main">
               <a:ext uri="{FF2B5EF4-FFF2-40B4-BE49-F238E27FC236}">
-                <a16:creationId xmlns:a16="http://schemas.microsoft.com/office/drawing/2014/main" id="{22FE053B-91E8-462F-9EC9-2208B899015A}"/>
+                <a16:creationId xmlns:a16="http://schemas.microsoft.com/office/drawing/2014/main" id="{ACC7541E-4042-4829-B3C9-35351E0C8B99}"/>
               </a:ext>
             </a:extLst>
           </p:cNvPr>
@@ -9879,7 +9879,7 @@
           <p:cNvPr id="5" name="">
             <a:extLst xmlns:a="http://schemas.openxmlformats.org/drawingml/2006/main">
               <a:ext uri="{FF2B5EF4-FFF2-40B4-BE49-F238E27FC236}">
-                <a16:creationId xmlns:a16="http://schemas.microsoft.com/office/drawing/2014/main" id="{24E1B338-BD8F-4A8C-B74E-924F26AEAE78}"/>
+                <a16:creationId xmlns:a16="http://schemas.microsoft.com/office/drawing/2014/main" id="{E53123B7-1688-4AA0-B557-052579E4625C}"/>
               </a:ext>
             </a:extLst>
           </p:cNvPr>
@@ -9937,7 +9937,7 @@
           <p:cNvPr id="6" name="">
             <a:extLst xmlns:a="http://schemas.openxmlformats.org/drawingml/2006/main">
               <a:ext uri="{FF2B5EF4-FFF2-40B4-BE49-F238E27FC236}">
-                <a16:creationId xmlns:a16="http://schemas.microsoft.com/office/drawing/2014/main" id="{E539930B-3C5F-405F-A193-596947858E8C}"/>
+                <a16:creationId xmlns:a16="http://schemas.microsoft.com/office/drawing/2014/main" id="{94FD64EC-FF56-4555-8F53-8DEDA03B81B4}"/>
               </a:ext>
             </a:extLst>
           </p:cNvPr>
@@ -9975,14 +9975,14 @@
             <a:pPr algn="r">
               <a:defRPr sz="675" b="1">
                 <a:solidFill>
-                  <a:srgbClr val="0E1B3E"/>
+                  <a:srgbClr val="070F26"/>
                 </a:solidFill>
               </a:defRPr>
             </a:pPr>
             <a:r>
               <a:rPr sz="675" b="1">
                 <a:solidFill>
-                  <a:srgbClr val="0E1B3E"/>
+                  <a:srgbClr val="070F26"/>
                 </a:solidFill>
               </a:rPr>
               <a:t>NTT DATA UNIVERSITY</a:t>
@@ -9995,7 +9995,7 @@
           <p:cNvPr id="7" name="">
             <a:extLst xmlns:a="http://schemas.openxmlformats.org/drawingml/2006/main">
               <a:ext uri="{FF2B5EF4-FFF2-40B4-BE49-F238E27FC236}">
-                <a16:creationId xmlns:a16="http://schemas.microsoft.com/office/drawing/2014/main" id="{261EBF28-E7EF-4346-94E1-9C592ADD4310}"/>
+                <a16:creationId xmlns:a16="http://schemas.microsoft.com/office/drawing/2014/main" id="{C54D8457-8C26-49D8-B582-8B854C8D8A12}"/>
               </a:ext>
             </a:extLst>
           </p:cNvPr>
@@ -10053,7 +10053,7 @@
           <p:cNvPr id="8" name="">
             <a:extLst xmlns:a="http://schemas.openxmlformats.org/drawingml/2006/main">
               <a:ext uri="{FF2B5EF4-FFF2-40B4-BE49-F238E27FC236}">
-                <a16:creationId xmlns:a16="http://schemas.microsoft.com/office/drawing/2014/main" id="{F440E2E4-9830-4342-987C-9BF160B19E60}"/>
+                <a16:creationId xmlns:a16="http://schemas.microsoft.com/office/drawing/2014/main" id="{BE7C7468-70D6-4918-A534-57FDE28F8713}"/>
               </a:ext>
             </a:extLst>
           </p:cNvPr>
@@ -10091,14 +10091,14 @@
             <a:pPr algn="l">
               <a:defRPr sz="2400" b="0">
                 <a:solidFill>
-                  <a:srgbClr val="0E1B3E"/>
+                  <a:srgbClr val="070F26"/>
                 </a:solidFill>
               </a:defRPr>
             </a:pPr>
             <a:r>
               <a:rPr sz="2400" b="0">
                 <a:solidFill>
-                  <a:srgbClr val="0E1B3E"/>
+                  <a:srgbClr val="070F26"/>
                 </a:solidFill>
               </a:rPr>
               <a:t>Cinco perguntas que guiam o módulo</a:t>
@@ -10111,7 +10111,7 @@
           <p:cNvPr id="9" name="">
             <a:extLst xmlns:a="http://schemas.openxmlformats.org/drawingml/2006/main">
               <a:ext uri="{FF2B5EF4-FFF2-40B4-BE49-F238E27FC236}">
-                <a16:creationId xmlns:a16="http://schemas.microsoft.com/office/drawing/2014/main" id="{AE2B45BA-A227-4704-AACF-3279F4FDF3DE}"/>
+                <a16:creationId xmlns:a16="http://schemas.microsoft.com/office/drawing/2014/main" id="{798E2737-43A0-4D69-A400-C136B9DE213A}"/>
               </a:ext>
             </a:extLst>
           </p:cNvPr>
@@ -10169,7 +10169,7 @@
           <p:cNvPr id="10" name="">
             <a:extLst xmlns:a="http://schemas.openxmlformats.org/drawingml/2006/main">
               <a:ext uri="{FF2B5EF4-FFF2-40B4-BE49-F238E27FC236}">
-                <a16:creationId xmlns:a16="http://schemas.microsoft.com/office/drawing/2014/main" id="{F2803C15-84D0-4A47-80FD-26AEF34728F6}"/>
+                <a16:creationId xmlns:a16="http://schemas.microsoft.com/office/drawing/2014/main" id="{A196E731-00D3-4D6B-B912-0541ADA991E3}"/>
               </a:ext>
             </a:extLst>
           </p:cNvPr>
@@ -10202,7 +10202,7 @@
           <p:cNvPr id="11" name="">
             <a:extLst xmlns:a="http://schemas.openxmlformats.org/drawingml/2006/main">
               <a:ext uri="{FF2B5EF4-FFF2-40B4-BE49-F238E27FC236}">
-                <a16:creationId xmlns:a16="http://schemas.microsoft.com/office/drawing/2014/main" id="{CD210F27-221A-488C-BA0D-C3AE47BAB30E}"/>
+                <a16:creationId xmlns:a16="http://schemas.microsoft.com/office/drawing/2014/main" id="{2F2AD945-8782-4DE9-B57D-E35982E4AF4F}"/>
               </a:ext>
             </a:extLst>
           </p:cNvPr>
@@ -10237,7 +10237,7 @@
           <p:cNvPr id="12" name="">
             <a:extLst xmlns:a="http://schemas.openxmlformats.org/drawingml/2006/main">
               <a:ext uri="{FF2B5EF4-FFF2-40B4-BE49-F238E27FC236}">
-                <a16:creationId xmlns:a16="http://schemas.microsoft.com/office/drawing/2014/main" id="{32484ECE-B223-4C01-A539-6CC71B6F4E89}"/>
+                <a16:creationId xmlns:a16="http://schemas.microsoft.com/office/drawing/2014/main" id="{A493822F-4FAE-40A6-8F0F-78B17480B37B}"/>
               </a:ext>
             </a:extLst>
           </p:cNvPr>
@@ -10295,7 +10295,7 @@
           <p:cNvPr id="13" name="">
             <a:extLst xmlns:a="http://schemas.openxmlformats.org/drawingml/2006/main">
               <a:ext uri="{FF2B5EF4-FFF2-40B4-BE49-F238E27FC236}">
-                <a16:creationId xmlns:a16="http://schemas.microsoft.com/office/drawing/2014/main" id="{7AFF3982-4573-4245-A635-98E0EF7F523B}"/>
+                <a16:creationId xmlns:a16="http://schemas.microsoft.com/office/drawing/2014/main" id="{DD001A99-DF4A-45B3-A5DF-24FD5EF51258}"/>
               </a:ext>
             </a:extLst>
           </p:cNvPr>
@@ -10387,7 +10387,7 @@
           <p:cNvPr id="14" name="">
             <a:extLst xmlns:a="http://schemas.openxmlformats.org/drawingml/2006/main">
               <a:ext uri="{FF2B5EF4-FFF2-40B4-BE49-F238E27FC236}">
-                <a16:creationId xmlns:a16="http://schemas.microsoft.com/office/drawing/2014/main" id="{FE63F746-C161-4731-8734-AD63D7F8B90A}"/>
+                <a16:creationId xmlns:a16="http://schemas.microsoft.com/office/drawing/2014/main" id="{5016251C-D6AC-490F-B77B-63A9F875F75E}"/>
               </a:ext>
             </a:extLst>
           </p:cNvPr>
@@ -10420,7 +10420,7 @@
           <p:cNvPr id="15" name="">
             <a:extLst xmlns:a="http://schemas.openxmlformats.org/drawingml/2006/main">
               <a:ext uri="{FF2B5EF4-FFF2-40B4-BE49-F238E27FC236}">
-                <a16:creationId xmlns:a16="http://schemas.microsoft.com/office/drawing/2014/main" id="{7DF81197-DB79-4180-8A8D-424BFDD56AE4}"/>
+                <a16:creationId xmlns:a16="http://schemas.microsoft.com/office/drawing/2014/main" id="{8028FDDE-483E-482E-ADD4-924BD48085EA}"/>
               </a:ext>
             </a:extLst>
           </p:cNvPr>
@@ -10455,7 +10455,7 @@
           <p:cNvPr id="16" name="">
             <a:extLst xmlns:a="http://schemas.openxmlformats.org/drawingml/2006/main">
               <a:ext uri="{FF2B5EF4-FFF2-40B4-BE49-F238E27FC236}">
-                <a16:creationId xmlns:a16="http://schemas.microsoft.com/office/drawing/2014/main" id="{D182725A-DE00-4045-AC81-8EAC9EB7F7DC}"/>
+                <a16:creationId xmlns:a16="http://schemas.microsoft.com/office/drawing/2014/main" id="{E2F55CF7-3DF7-4E3E-8D1E-7104461D9385}"/>
               </a:ext>
             </a:extLst>
           </p:cNvPr>
@@ -10513,7 +10513,7 @@
           <p:cNvPr id="17" name="">
             <a:extLst xmlns:a="http://schemas.openxmlformats.org/drawingml/2006/main">
               <a:ext uri="{FF2B5EF4-FFF2-40B4-BE49-F238E27FC236}">
-                <a16:creationId xmlns:a16="http://schemas.microsoft.com/office/drawing/2014/main" id="{F702DB2B-7F26-4A5C-AF80-D19E7BBCFC11}"/>
+                <a16:creationId xmlns:a16="http://schemas.microsoft.com/office/drawing/2014/main" id="{EE1E6606-A628-4443-B111-44D74AB01675}"/>
               </a:ext>
             </a:extLst>
           </p:cNvPr>
@@ -10605,7 +10605,7 @@
           <p:cNvPr id="18" name="">
             <a:extLst xmlns:a="http://schemas.openxmlformats.org/drawingml/2006/main">
               <a:ext uri="{FF2B5EF4-FFF2-40B4-BE49-F238E27FC236}">
-                <a16:creationId xmlns:a16="http://schemas.microsoft.com/office/drawing/2014/main" id="{E12C4E42-632B-4F70-AC42-87D11065837F}"/>
+                <a16:creationId xmlns:a16="http://schemas.microsoft.com/office/drawing/2014/main" id="{331CCC9A-36A6-4666-A18E-FA7D64B2F2F9}"/>
               </a:ext>
             </a:extLst>
           </p:cNvPr>
@@ -10638,7 +10638,7 @@
           <p:cNvPr id="19" name="">
             <a:extLst xmlns:a="http://schemas.openxmlformats.org/drawingml/2006/main">
               <a:ext uri="{FF2B5EF4-FFF2-40B4-BE49-F238E27FC236}">
-                <a16:creationId xmlns:a16="http://schemas.microsoft.com/office/drawing/2014/main" id="{0085F28D-4337-42C3-9AD4-1026BFC3DFEC}"/>
+                <a16:creationId xmlns:a16="http://schemas.microsoft.com/office/drawing/2014/main" id="{DD80DC7F-AF7B-4DF0-BDEC-249A4D230913}"/>
               </a:ext>
             </a:extLst>
           </p:cNvPr>
@@ -10673,7 +10673,7 @@
           <p:cNvPr id="20" name="">
             <a:extLst xmlns:a="http://schemas.openxmlformats.org/drawingml/2006/main">
               <a:ext uri="{FF2B5EF4-FFF2-40B4-BE49-F238E27FC236}">
-                <a16:creationId xmlns:a16="http://schemas.microsoft.com/office/drawing/2014/main" id="{6B3DA587-874E-4E3F-8E53-87F867926E10}"/>
+                <a16:creationId xmlns:a16="http://schemas.microsoft.com/office/drawing/2014/main" id="{C3F6B35C-9500-40B0-89FE-A191046C327D}"/>
               </a:ext>
             </a:extLst>
           </p:cNvPr>
@@ -10731,7 +10731,7 @@
           <p:cNvPr id="21" name="">
             <a:extLst xmlns:a="http://schemas.openxmlformats.org/drawingml/2006/main">
               <a:ext uri="{FF2B5EF4-FFF2-40B4-BE49-F238E27FC236}">
-                <a16:creationId xmlns:a16="http://schemas.microsoft.com/office/drawing/2014/main" id="{8EDD6FEB-C810-4E6A-A5A4-A739AA1C39EC}"/>
+                <a16:creationId xmlns:a16="http://schemas.microsoft.com/office/drawing/2014/main" id="{2E063578-13F6-431C-AE4B-E77BC456E7A8}"/>
               </a:ext>
             </a:extLst>
           </p:cNvPr>
@@ -10821,7 +10821,7 @@
     </p:spTree>
     <p:extLst>
       <p:ext uri="{BB962C8B-B14F-4D97-AF65-F5344CB8AC3E}">
-        <p14:creationId xmlns:p14="http://schemas.microsoft.com/office/powerpoint/2010/main" val="2117623834"/>
+        <p14:creationId xmlns:p14="http://schemas.microsoft.com/office/powerpoint/2010/main" val="1638258273"/>
       </p:ext>
     </p:extLst>
   </p:cSld>
@@ -10834,7 +10834,7 @@
     <p:bg>
       <p:bgPr>
         <a:solidFill xmlns:a="http://schemas.openxmlformats.org/drawingml/2006/main">
-          <a:srgbClr val="0E1B3E"/>
+          <a:srgbClr val="070F26"/>
         </a:solidFill>
       </p:bgPr>
     </p:bg>
@@ -10852,7 +10852,7 @@
           <p:cNvPr id="1" name="">
             <a:extLst xmlns:a="http://schemas.openxmlformats.org/drawingml/2006/main">
               <a:ext uri="{FF2B5EF4-FFF2-40B4-BE49-F238E27FC236}">
-                <a16:creationId xmlns:a16="http://schemas.microsoft.com/office/drawing/2014/main" id="{11BB4058-4034-4A30-831A-39A47D304DF5}"/>
+                <a16:creationId xmlns:a16="http://schemas.microsoft.com/office/drawing/2014/main" id="{480B81C8-14F3-4165-99A7-B90DC20BD158}"/>
               </a:ext>
             </a:extLst>
           </p:cNvPr>
@@ -10870,7 +10870,7 @@
             <a:avLst/>
           </a:prstGeom>
           <a:solidFill xmlns:a="http://schemas.openxmlformats.org/drawingml/2006/main">
-            <a:srgbClr val="0E1B3E"/>
+            <a:srgbClr val="070F26"/>
           </a:solidFill>
           <a:ln xmlns:a="http://schemas.openxmlformats.org/drawingml/2006/main" w="0">
             <a:solidFill>
@@ -10891,7 +10891,7 @@
           <p:nvPr/>
         </p:nvPicPr>
         <p:blipFill>
-          <a:blip xmlns:r="http://schemas.openxmlformats.org/officeDocument/2006/relationships" xmlns:a="http://schemas.openxmlformats.org/drawingml/2006/main" r:embed="R2b547708035c4601"/>
+          <a:blip xmlns:r="http://schemas.openxmlformats.org/officeDocument/2006/relationships" xmlns:a="http://schemas.openxmlformats.org/drawingml/2006/main" r:embed="Rb17072beb72b42f6"/>
           <a:stretch xmlns:a="http://schemas.openxmlformats.org/drawingml/2006/main"/>
         </p:blipFill>
         <p:spPr>
@@ -10909,7 +10909,7 @@
           <p:cNvPr id="3" name="">
             <a:extLst xmlns:a="http://schemas.openxmlformats.org/drawingml/2006/main">
               <a:ext uri="{FF2B5EF4-FFF2-40B4-BE49-F238E27FC236}">
-                <a16:creationId xmlns:a16="http://schemas.microsoft.com/office/drawing/2014/main" id="{CC1887A7-CB87-4F89-88F1-4CED1851A37F}"/>
+                <a16:creationId xmlns:a16="http://schemas.microsoft.com/office/drawing/2014/main" id="{F8E0F33C-5223-4335-96E3-0523156BF59F}"/>
               </a:ext>
             </a:extLst>
           </p:cNvPr>
@@ -10967,7 +10967,7 @@
           <p:cNvPr id="4" name="">
             <a:extLst xmlns:a="http://schemas.openxmlformats.org/drawingml/2006/main">
               <a:ext uri="{FF2B5EF4-FFF2-40B4-BE49-F238E27FC236}">
-                <a16:creationId xmlns:a16="http://schemas.microsoft.com/office/drawing/2014/main" id="{F8C7D9D8-8797-446F-91F2-59AFE6C3BC93}"/>
+                <a16:creationId xmlns:a16="http://schemas.microsoft.com/office/drawing/2014/main" id="{1DB605A5-98C2-412E-AE82-334396CAC1D4}"/>
               </a:ext>
             </a:extLst>
           </p:cNvPr>
@@ -11025,7 +11025,7 @@
           <p:cNvPr id="5" name="">
             <a:extLst xmlns:a="http://schemas.openxmlformats.org/drawingml/2006/main">
               <a:ext uri="{FF2B5EF4-FFF2-40B4-BE49-F238E27FC236}">
-                <a16:creationId xmlns:a16="http://schemas.microsoft.com/office/drawing/2014/main" id="{8F988932-3236-458E-B1DF-30B5981A0593}"/>
+                <a16:creationId xmlns:a16="http://schemas.microsoft.com/office/drawing/2014/main" id="{E8DFA399-A2E4-4EAB-A675-1741AA170319}"/>
               </a:ext>
             </a:extLst>
           </p:cNvPr>
@@ -11083,7 +11083,7 @@
           <p:cNvPr id="6" name="">
             <a:extLst xmlns:a="http://schemas.openxmlformats.org/drawingml/2006/main">
               <a:ext uri="{FF2B5EF4-FFF2-40B4-BE49-F238E27FC236}">
-                <a16:creationId xmlns:a16="http://schemas.microsoft.com/office/drawing/2014/main" id="{190111D0-A3F1-424B-A4A9-BAB4FD115CDF}"/>
+                <a16:creationId xmlns:a16="http://schemas.microsoft.com/office/drawing/2014/main" id="{8481E131-2D6E-4AFE-B419-06DF2056A9CE}"/>
               </a:ext>
             </a:extLst>
           </p:cNvPr>
@@ -11145,13 +11145,13 @@
           <p:nvPr/>
         </p:nvPicPr>
         <p:blipFill>
-          <a:blip xmlns:r="http://schemas.openxmlformats.org/officeDocument/2006/relationships" xmlns:a="http://schemas.openxmlformats.org/drawingml/2006/main" r:embed="Ra29ed06531564265"/>
+          <a:blip xmlns:r="http://schemas.openxmlformats.org/officeDocument/2006/relationships" xmlns:a="http://schemas.openxmlformats.org/drawingml/2006/main" r:embed="R6c8aeadcc7594dd9"/>
           <a:stretch xmlns:a="http://schemas.openxmlformats.org/drawingml/2006/main"/>
         </p:blipFill>
         <p:spPr>
           <a:xfrm xmlns:a="http://schemas.openxmlformats.org/drawingml/2006/main">
-            <a:off x="476250" y="1257300"/>
-            <a:ext cx="2667000" cy="4533900"/>
+            <a:off x="0" y="1746250"/>
+            <a:ext cx="2667000" cy="3556000"/>
           </a:xfrm>
           <a:prstGeom xmlns:a="http://schemas.openxmlformats.org/drawingml/2006/main" prst="rect">
             <a:avLst/>
@@ -11163,7 +11163,7 @@
           <p:cNvPr id="8" name="">
             <a:extLst xmlns:a="http://schemas.openxmlformats.org/drawingml/2006/main">
               <a:ext uri="{FF2B5EF4-FFF2-40B4-BE49-F238E27FC236}">
-                <a16:creationId xmlns:a16="http://schemas.microsoft.com/office/drawing/2014/main" id="{B543F101-96CA-4FDF-9781-12FE693AFCF2}"/>
+                <a16:creationId xmlns:a16="http://schemas.microsoft.com/office/drawing/2014/main" id="{2B20F55E-3A92-4C8B-9D19-B24149099F4C}"/>
               </a:ext>
             </a:extLst>
           </p:cNvPr>
@@ -11221,7 +11221,7 @@
           <p:cNvPr id="9" name="">
             <a:extLst xmlns:a="http://schemas.openxmlformats.org/drawingml/2006/main">
               <a:ext uri="{FF2B5EF4-FFF2-40B4-BE49-F238E27FC236}">
-                <a16:creationId xmlns:a16="http://schemas.microsoft.com/office/drawing/2014/main" id="{F70CE533-2578-4D8E-8631-D6DAC82F08D8}"/>
+                <a16:creationId xmlns:a16="http://schemas.microsoft.com/office/drawing/2014/main" id="{22D6813C-7555-4802-B2E0-432956CF6B79}"/>
               </a:ext>
             </a:extLst>
           </p:cNvPr>
@@ -11279,7 +11279,7 @@
           <p:cNvPr id="10" name="">
             <a:extLst xmlns:a="http://schemas.openxmlformats.org/drawingml/2006/main">
               <a:ext uri="{FF2B5EF4-FFF2-40B4-BE49-F238E27FC236}">
-                <a16:creationId xmlns:a16="http://schemas.microsoft.com/office/drawing/2014/main" id="{DBDD9B43-B5B7-403B-BE53-009E02E79C62}"/>
+                <a16:creationId xmlns:a16="http://schemas.microsoft.com/office/drawing/2014/main" id="{B6BCD55B-0324-4C65-9A93-EBC6E59433D7}"/>
               </a:ext>
             </a:extLst>
           </p:cNvPr>
@@ -11335,7 +11335,7 @@
     </p:spTree>
     <p:extLst>
       <p:ext uri="{BB962C8B-B14F-4D97-AF65-F5344CB8AC3E}">
-        <p14:creationId xmlns:p14="http://schemas.microsoft.com/office/powerpoint/2010/main" val="662971694"/>
+        <p14:creationId xmlns:p14="http://schemas.microsoft.com/office/powerpoint/2010/main" val="793234494"/>
       </p:ext>
     </p:extLst>
   </p:cSld>
@@ -11366,7 +11366,7 @@
           <p:cNvPr id="1" name="">
             <a:extLst xmlns:a="http://schemas.openxmlformats.org/drawingml/2006/main">
               <a:ext uri="{FF2B5EF4-FFF2-40B4-BE49-F238E27FC236}">
-                <a16:creationId xmlns:a16="http://schemas.microsoft.com/office/drawing/2014/main" id="{3718F0DF-32F8-47DC-9105-FD268493E418}"/>
+                <a16:creationId xmlns:a16="http://schemas.microsoft.com/office/drawing/2014/main" id="{22E50080-DDDB-4E7C-BF36-9E009F0C1021}"/>
               </a:ext>
             </a:extLst>
           </p:cNvPr>
@@ -11405,7 +11405,7 @@
           <p:nvPr/>
         </p:nvPicPr>
         <p:blipFill>
-          <a:blip xmlns:r="http://schemas.openxmlformats.org/officeDocument/2006/relationships" xmlns:a="http://schemas.openxmlformats.org/drawingml/2006/main" r:embed="R55915a57262448b3"/>
+          <a:blip xmlns:r="http://schemas.openxmlformats.org/officeDocument/2006/relationships" xmlns:a="http://schemas.openxmlformats.org/drawingml/2006/main" r:embed="Re93006f9195040bc"/>
           <a:stretch xmlns:a="http://schemas.openxmlformats.org/drawingml/2006/main"/>
         </p:blipFill>
         <p:spPr>
@@ -11423,7 +11423,7 @@
           <p:cNvPr id="3" name="">
             <a:extLst xmlns:a="http://schemas.openxmlformats.org/drawingml/2006/main">
               <a:ext uri="{FF2B5EF4-FFF2-40B4-BE49-F238E27FC236}">
-                <a16:creationId xmlns:a16="http://schemas.microsoft.com/office/drawing/2014/main" id="{BC02B9ED-032A-408F-A686-515D310BD204}"/>
+                <a16:creationId xmlns:a16="http://schemas.microsoft.com/office/drawing/2014/main" id="{04D85B15-25F8-405A-ADBC-FC874800C01D}"/>
               </a:ext>
             </a:extLst>
           </p:cNvPr>
@@ -11461,14 +11461,14 @@
             <a:pPr algn="r">
               <a:defRPr sz="825" b="1">
                 <a:solidFill>
-                  <a:srgbClr val="0E1B3E"/>
+                  <a:srgbClr val="070F26"/>
                 </a:solidFill>
               </a:defRPr>
             </a:pPr>
             <a:r>
               <a:rPr sz="825" b="1">
                 <a:solidFill>
-                  <a:srgbClr val="0E1B3E"/>
+                  <a:srgbClr val="070F26"/>
                 </a:solidFill>
               </a:rPr>
               <a:t>NTT DATA UNIVERSITY</a:t>
@@ -11481,7 +11481,7 @@
           <p:cNvPr id="4" name="">
             <a:extLst xmlns:a="http://schemas.openxmlformats.org/drawingml/2006/main">
               <a:ext uri="{FF2B5EF4-FFF2-40B4-BE49-F238E27FC236}">
-                <a16:creationId xmlns:a16="http://schemas.microsoft.com/office/drawing/2014/main" id="{CDBF329E-0780-4BCF-A67C-B430D66324E2}"/>
+                <a16:creationId xmlns:a16="http://schemas.microsoft.com/office/drawing/2014/main" id="{04686967-EADC-4DD7-A77A-D88946D37AD9}"/>
               </a:ext>
             </a:extLst>
           </p:cNvPr>
@@ -11539,7 +11539,7 @@
           <p:cNvPr id="5" name="">
             <a:extLst xmlns:a="http://schemas.openxmlformats.org/drawingml/2006/main">
               <a:ext uri="{FF2B5EF4-FFF2-40B4-BE49-F238E27FC236}">
-                <a16:creationId xmlns:a16="http://schemas.microsoft.com/office/drawing/2014/main" id="{83ECCF80-C7A6-4990-AA4E-716FD14015AC}"/>
+                <a16:creationId xmlns:a16="http://schemas.microsoft.com/office/drawing/2014/main" id="{60B4C573-F12B-4463-8237-D7951F2332EF}"/>
               </a:ext>
             </a:extLst>
           </p:cNvPr>
@@ -11597,7 +11597,7 @@
           <p:cNvPr id="6" name="">
             <a:extLst xmlns:a="http://schemas.openxmlformats.org/drawingml/2006/main">
               <a:ext uri="{FF2B5EF4-FFF2-40B4-BE49-F238E27FC236}">
-                <a16:creationId xmlns:a16="http://schemas.microsoft.com/office/drawing/2014/main" id="{0FDFA03F-B79A-41A4-9713-0B2B46090CC0}"/>
+                <a16:creationId xmlns:a16="http://schemas.microsoft.com/office/drawing/2014/main" id="{5D9866FF-8A32-4683-BC30-3D6EE5561412}"/>
               </a:ext>
             </a:extLst>
           </p:cNvPr>
@@ -11635,14 +11635,14 @@
             <a:pPr algn="r">
               <a:defRPr sz="675" b="1">
                 <a:solidFill>
-                  <a:srgbClr val="0E1B3E"/>
+                  <a:srgbClr val="070F26"/>
                 </a:solidFill>
               </a:defRPr>
             </a:pPr>
             <a:r>
               <a:rPr sz="675" b="1">
                 <a:solidFill>
-                  <a:srgbClr val="0E1B3E"/>
+                  <a:srgbClr val="070F26"/>
                 </a:solidFill>
               </a:rPr>
               <a:t>NTT DATA UNIVERSITY</a:t>
@@ -11655,7 +11655,7 @@
           <p:cNvPr id="7" name="">
             <a:extLst xmlns:a="http://schemas.openxmlformats.org/drawingml/2006/main">
               <a:ext uri="{FF2B5EF4-FFF2-40B4-BE49-F238E27FC236}">
-                <a16:creationId xmlns:a16="http://schemas.microsoft.com/office/drawing/2014/main" id="{57697818-BC5D-4893-959F-1B2334E57A78}"/>
+                <a16:creationId xmlns:a16="http://schemas.microsoft.com/office/drawing/2014/main" id="{2D0FBDD3-B541-42C3-B5FE-6901CB8D0CF6}"/>
               </a:ext>
             </a:extLst>
           </p:cNvPr>
@@ -11713,7 +11713,7 @@
           <p:cNvPr id="8" name="">
             <a:extLst xmlns:a="http://schemas.openxmlformats.org/drawingml/2006/main">
               <a:ext uri="{FF2B5EF4-FFF2-40B4-BE49-F238E27FC236}">
-                <a16:creationId xmlns:a16="http://schemas.microsoft.com/office/drawing/2014/main" id="{B0FD784D-82C3-4F9C-ADE7-B410383B7B25}"/>
+                <a16:creationId xmlns:a16="http://schemas.microsoft.com/office/drawing/2014/main" id="{B50ADF69-A0A3-4852-916E-38A6A268EA45}"/>
               </a:ext>
             </a:extLst>
           </p:cNvPr>
@@ -11751,14 +11751,14 @@
             <a:pPr algn="l">
               <a:defRPr sz="2400" b="0">
                 <a:solidFill>
-                  <a:srgbClr val="0E1B3E"/>
+                  <a:srgbClr val="070F26"/>
                 </a:solidFill>
               </a:defRPr>
             </a:pPr>
             <a:r>
               <a:rPr sz="2400" b="0">
                 <a:solidFill>
-                  <a:srgbClr val="0E1B3E"/>
+                  <a:srgbClr val="070F26"/>
                 </a:solidFill>
               </a:rPr>
               <a:t>Provocações antes do exercício</a:t>
@@ -11771,7 +11771,7 @@
           <p:cNvPr id="9" name="">
             <a:extLst xmlns:a="http://schemas.openxmlformats.org/drawingml/2006/main">
               <a:ext uri="{FF2B5EF4-FFF2-40B4-BE49-F238E27FC236}">
-                <a16:creationId xmlns:a16="http://schemas.microsoft.com/office/drawing/2014/main" id="{F1ACF110-DCDD-4787-A47C-A632724EB275}"/>
+                <a16:creationId xmlns:a16="http://schemas.microsoft.com/office/drawing/2014/main" id="{E4DA923C-328E-49CA-A578-EA7E6E8D4CB3}"/>
               </a:ext>
             </a:extLst>
           </p:cNvPr>
@@ -11829,7 +11829,7 @@
           <p:cNvPr id="10" name="">
             <a:extLst xmlns:a="http://schemas.openxmlformats.org/drawingml/2006/main">
               <a:ext uri="{FF2B5EF4-FFF2-40B4-BE49-F238E27FC236}">
-                <a16:creationId xmlns:a16="http://schemas.microsoft.com/office/drawing/2014/main" id="{E65D549E-C7AF-4793-80C2-658712DBC641}"/>
+                <a16:creationId xmlns:a16="http://schemas.microsoft.com/office/drawing/2014/main" id="{4C285567-196C-4EBE-8335-5FAE06BE98FE}"/>
               </a:ext>
             </a:extLst>
           </p:cNvPr>
@@ -11862,7 +11862,7 @@
           <p:cNvPr id="11" name="">
             <a:extLst xmlns:a="http://schemas.openxmlformats.org/drawingml/2006/main">
               <a:ext uri="{FF2B5EF4-FFF2-40B4-BE49-F238E27FC236}">
-                <a16:creationId xmlns:a16="http://schemas.microsoft.com/office/drawing/2014/main" id="{2ACD9CB3-90BD-4244-B39D-CB74D1C7AF58}"/>
+                <a16:creationId xmlns:a16="http://schemas.microsoft.com/office/drawing/2014/main" id="{74356DB7-E097-4930-89E8-09486A9B23C8}"/>
               </a:ext>
             </a:extLst>
           </p:cNvPr>
@@ -11897,7 +11897,7 @@
           <p:cNvPr id="12" name="">
             <a:extLst xmlns:a="http://schemas.openxmlformats.org/drawingml/2006/main">
               <a:ext uri="{FF2B5EF4-FFF2-40B4-BE49-F238E27FC236}">
-                <a16:creationId xmlns:a16="http://schemas.microsoft.com/office/drawing/2014/main" id="{E63F9B97-DD97-4EC8-A233-B6A4AE59E9F2}"/>
+                <a16:creationId xmlns:a16="http://schemas.microsoft.com/office/drawing/2014/main" id="{E85A43FB-D439-4F3C-8254-BF32AF4CC94D}"/>
               </a:ext>
             </a:extLst>
           </p:cNvPr>
@@ -11955,7 +11955,7 @@
           <p:cNvPr id="13" name="">
             <a:extLst xmlns:a="http://schemas.openxmlformats.org/drawingml/2006/main">
               <a:ext uri="{FF2B5EF4-FFF2-40B4-BE49-F238E27FC236}">
-                <a16:creationId xmlns:a16="http://schemas.microsoft.com/office/drawing/2014/main" id="{4F9960F2-ABB8-41FD-89C3-FE93DE0FAD79}"/>
+                <a16:creationId xmlns:a16="http://schemas.microsoft.com/office/drawing/2014/main" id="{1CE854E8-E797-42CD-B7A5-A3EB55203508}"/>
               </a:ext>
             </a:extLst>
           </p:cNvPr>
@@ -12030,7 +12030,7 @@
           <p:cNvPr id="14" name="">
             <a:extLst xmlns:a="http://schemas.openxmlformats.org/drawingml/2006/main">
               <a:ext uri="{FF2B5EF4-FFF2-40B4-BE49-F238E27FC236}">
-                <a16:creationId xmlns:a16="http://schemas.microsoft.com/office/drawing/2014/main" id="{5F4BCFA6-B457-4AC8-8ED6-7810D10CDC8C}"/>
+                <a16:creationId xmlns:a16="http://schemas.microsoft.com/office/drawing/2014/main" id="{349E0AF5-D4DE-436E-B7C1-9613C6A8845C}"/>
               </a:ext>
             </a:extLst>
           </p:cNvPr>
@@ -12063,7 +12063,7 @@
           <p:cNvPr id="15" name="">
             <a:extLst xmlns:a="http://schemas.openxmlformats.org/drawingml/2006/main">
               <a:ext uri="{FF2B5EF4-FFF2-40B4-BE49-F238E27FC236}">
-                <a16:creationId xmlns:a16="http://schemas.microsoft.com/office/drawing/2014/main" id="{14325994-61DB-4CE5-811A-DACE21D02B73}"/>
+                <a16:creationId xmlns:a16="http://schemas.microsoft.com/office/drawing/2014/main" id="{4B07240F-AF2B-4FB4-9E22-53EC422F5D2C}"/>
               </a:ext>
             </a:extLst>
           </p:cNvPr>
@@ -12098,7 +12098,7 @@
           <p:cNvPr id="16" name="">
             <a:extLst xmlns:a="http://schemas.openxmlformats.org/drawingml/2006/main">
               <a:ext uri="{FF2B5EF4-FFF2-40B4-BE49-F238E27FC236}">
-                <a16:creationId xmlns:a16="http://schemas.microsoft.com/office/drawing/2014/main" id="{C5531A82-65CE-48AE-93A3-AE02DC7FBED0}"/>
+                <a16:creationId xmlns:a16="http://schemas.microsoft.com/office/drawing/2014/main" id="{A08220F5-0B80-43B6-9DB9-A2C85DF19308}"/>
               </a:ext>
             </a:extLst>
           </p:cNvPr>
@@ -12156,7 +12156,7 @@
           <p:cNvPr id="17" name="">
             <a:extLst xmlns:a="http://schemas.openxmlformats.org/drawingml/2006/main">
               <a:ext uri="{FF2B5EF4-FFF2-40B4-BE49-F238E27FC236}">
-                <a16:creationId xmlns:a16="http://schemas.microsoft.com/office/drawing/2014/main" id="{308D5757-ED36-4C11-BB2D-DE555F80D728}"/>
+                <a16:creationId xmlns:a16="http://schemas.microsoft.com/office/drawing/2014/main" id="{C1F19F81-1A70-41BF-8201-CFDEFA59D6F7}"/>
               </a:ext>
             </a:extLst>
           </p:cNvPr>
@@ -12231,7 +12231,7 @@
           <p:cNvPr id="18" name="">
             <a:extLst xmlns:a="http://schemas.openxmlformats.org/drawingml/2006/main">
               <a:ext uri="{FF2B5EF4-FFF2-40B4-BE49-F238E27FC236}">
-                <a16:creationId xmlns:a16="http://schemas.microsoft.com/office/drawing/2014/main" id="{AACCA0F2-6EA2-424B-9982-1BDF2115C03A}"/>
+                <a16:creationId xmlns:a16="http://schemas.microsoft.com/office/drawing/2014/main" id="{D951E56D-B290-43B3-9082-E667F2AF0E9B}"/>
               </a:ext>
             </a:extLst>
           </p:cNvPr>
@@ -12264,7 +12264,7 @@
           <p:cNvPr id="19" name="">
             <a:extLst xmlns:a="http://schemas.openxmlformats.org/drawingml/2006/main">
               <a:ext uri="{FF2B5EF4-FFF2-40B4-BE49-F238E27FC236}">
-                <a16:creationId xmlns:a16="http://schemas.microsoft.com/office/drawing/2014/main" id="{63C95F3B-009B-439C-B6C7-49F0283603F3}"/>
+                <a16:creationId xmlns:a16="http://schemas.microsoft.com/office/drawing/2014/main" id="{B39807A7-C841-4695-9FFB-15D49CD36E35}"/>
               </a:ext>
             </a:extLst>
           </p:cNvPr>
@@ -12299,7 +12299,7 @@
           <p:cNvPr id="20" name="">
             <a:extLst xmlns:a="http://schemas.openxmlformats.org/drawingml/2006/main">
               <a:ext uri="{FF2B5EF4-FFF2-40B4-BE49-F238E27FC236}">
-                <a16:creationId xmlns:a16="http://schemas.microsoft.com/office/drawing/2014/main" id="{895109B4-198C-4265-B7C1-07D0113B1B5B}"/>
+                <a16:creationId xmlns:a16="http://schemas.microsoft.com/office/drawing/2014/main" id="{EBB82355-22B7-432D-B937-74DA6C237DB3}"/>
               </a:ext>
             </a:extLst>
           </p:cNvPr>
@@ -12357,7 +12357,7 @@
           <p:cNvPr id="21" name="">
             <a:extLst xmlns:a="http://schemas.openxmlformats.org/drawingml/2006/main">
               <a:ext uri="{FF2B5EF4-FFF2-40B4-BE49-F238E27FC236}">
-                <a16:creationId xmlns:a16="http://schemas.microsoft.com/office/drawing/2014/main" id="{BD29B839-A04E-48D5-A6C2-4E48A0895D3E}"/>
+                <a16:creationId xmlns:a16="http://schemas.microsoft.com/office/drawing/2014/main" id="{89E63F8D-CDF4-49FC-931A-62C78E6FCB88}"/>
               </a:ext>
             </a:extLst>
           </p:cNvPr>
@@ -12432,7 +12432,7 @@
           <p:cNvPr id="22" name="">
             <a:extLst xmlns:a="http://schemas.openxmlformats.org/drawingml/2006/main">
               <a:ext uri="{FF2B5EF4-FFF2-40B4-BE49-F238E27FC236}">
-                <a16:creationId xmlns:a16="http://schemas.microsoft.com/office/drawing/2014/main" id="{2AE490C7-E1D1-498A-AED1-69847FCAB9A0}"/>
+                <a16:creationId xmlns:a16="http://schemas.microsoft.com/office/drawing/2014/main" id="{B0F3A7CA-B2FE-455E-A2D7-BE99F10F604E}"/>
               </a:ext>
             </a:extLst>
           </p:cNvPr>
@@ -12465,7 +12465,7 @@
           <p:cNvPr id="23" name="">
             <a:extLst xmlns:a="http://schemas.openxmlformats.org/drawingml/2006/main">
               <a:ext uri="{FF2B5EF4-FFF2-40B4-BE49-F238E27FC236}">
-                <a16:creationId xmlns:a16="http://schemas.microsoft.com/office/drawing/2014/main" id="{714D658E-C5B6-4B87-BAED-1ED081983F72}"/>
+                <a16:creationId xmlns:a16="http://schemas.microsoft.com/office/drawing/2014/main" id="{92BCCB0D-3FC4-45DA-BE65-A5D8FC4EEDC9}"/>
               </a:ext>
             </a:extLst>
           </p:cNvPr>
@@ -12500,7 +12500,7 @@
           <p:cNvPr id="24" name="">
             <a:extLst xmlns:a="http://schemas.openxmlformats.org/drawingml/2006/main">
               <a:ext uri="{FF2B5EF4-FFF2-40B4-BE49-F238E27FC236}">
-                <a16:creationId xmlns:a16="http://schemas.microsoft.com/office/drawing/2014/main" id="{8C39ADAE-30FC-4005-8874-D8C99083738A}"/>
+                <a16:creationId xmlns:a16="http://schemas.microsoft.com/office/drawing/2014/main" id="{997734C0-653F-4A80-912C-7EDE4727A805}"/>
               </a:ext>
             </a:extLst>
           </p:cNvPr>
@@ -12558,7 +12558,7 @@
           <p:cNvPr id="25" name="">
             <a:extLst xmlns:a="http://schemas.openxmlformats.org/drawingml/2006/main">
               <a:ext uri="{FF2B5EF4-FFF2-40B4-BE49-F238E27FC236}">
-                <a16:creationId xmlns:a16="http://schemas.microsoft.com/office/drawing/2014/main" id="{96AB2937-903B-408E-B396-722FCE33CE83}"/>
+                <a16:creationId xmlns:a16="http://schemas.microsoft.com/office/drawing/2014/main" id="{16410BB1-02AE-466D-B59E-1447F7399CDF}"/>
               </a:ext>
             </a:extLst>
           </p:cNvPr>
@@ -12631,7 +12631,7 @@
     </p:spTree>
     <p:extLst>
       <p:ext uri="{BB962C8B-B14F-4D97-AF65-F5344CB8AC3E}">
-        <p14:creationId xmlns:p14="http://schemas.microsoft.com/office/powerpoint/2010/main" val="1639498607"/>
+        <p14:creationId xmlns:p14="http://schemas.microsoft.com/office/powerpoint/2010/main" val="6035869"/>
       </p:ext>
     </p:extLst>
   </p:cSld>
@@ -12644,7 +12644,7 @@
     <p:bg>
       <p:bgPr>
         <a:solidFill xmlns:a="http://schemas.openxmlformats.org/drawingml/2006/main">
-          <a:srgbClr val="0E1B3E"/>
+          <a:srgbClr val="070F26"/>
         </a:solidFill>
       </p:bgPr>
     </p:bg>
@@ -12662,7 +12662,7 @@
           <p:cNvPr id="1" name="">
             <a:extLst xmlns:a="http://schemas.openxmlformats.org/drawingml/2006/main">
               <a:ext uri="{FF2B5EF4-FFF2-40B4-BE49-F238E27FC236}">
-                <a16:creationId xmlns:a16="http://schemas.microsoft.com/office/drawing/2014/main" id="{C0879008-80CB-4461-B7E1-AD5410FBBEA4}"/>
+                <a16:creationId xmlns:a16="http://schemas.microsoft.com/office/drawing/2014/main" id="{1D1369CA-3CBC-4DBB-9030-9B493491B4CE}"/>
               </a:ext>
             </a:extLst>
           </p:cNvPr>
@@ -12680,7 +12680,7 @@
             <a:avLst/>
           </a:prstGeom>
           <a:solidFill xmlns:a="http://schemas.openxmlformats.org/drawingml/2006/main">
-            <a:srgbClr val="0E1B3E"/>
+            <a:srgbClr val="070F26"/>
           </a:solidFill>
           <a:ln xmlns:a="http://schemas.openxmlformats.org/drawingml/2006/main" w="0">
             <a:solidFill>
@@ -12701,7 +12701,7 @@
           <p:nvPr/>
         </p:nvPicPr>
         <p:blipFill>
-          <a:blip xmlns:r="http://schemas.openxmlformats.org/officeDocument/2006/relationships" xmlns:a="http://schemas.openxmlformats.org/drawingml/2006/main" r:embed="R24be675a3878410c"/>
+          <a:blip xmlns:r="http://schemas.openxmlformats.org/officeDocument/2006/relationships" xmlns:a="http://schemas.openxmlformats.org/drawingml/2006/main" r:embed="R608ab08f9aca41ca"/>
           <a:stretch xmlns:a="http://schemas.openxmlformats.org/drawingml/2006/main"/>
         </p:blipFill>
         <p:spPr>
@@ -12719,7 +12719,7 @@
           <p:cNvPr id="3" name="">
             <a:extLst xmlns:a="http://schemas.openxmlformats.org/drawingml/2006/main">
               <a:ext uri="{FF2B5EF4-FFF2-40B4-BE49-F238E27FC236}">
-                <a16:creationId xmlns:a16="http://schemas.microsoft.com/office/drawing/2014/main" id="{50BEE2BA-EB84-4CA7-BDB2-638CB07864BA}"/>
+                <a16:creationId xmlns:a16="http://schemas.microsoft.com/office/drawing/2014/main" id="{9AFD92A3-6788-435D-8C7A-D254DF69AFBB}"/>
               </a:ext>
             </a:extLst>
           </p:cNvPr>
@@ -12777,7 +12777,7 @@
           <p:cNvPr id="4" name="">
             <a:extLst xmlns:a="http://schemas.openxmlformats.org/drawingml/2006/main">
               <a:ext uri="{FF2B5EF4-FFF2-40B4-BE49-F238E27FC236}">
-                <a16:creationId xmlns:a16="http://schemas.microsoft.com/office/drawing/2014/main" id="{073733C1-C42D-481E-BB62-B9DC67FD0B2A}"/>
+                <a16:creationId xmlns:a16="http://schemas.microsoft.com/office/drawing/2014/main" id="{D398F163-7777-4261-8B3B-C99E39B76D09}"/>
               </a:ext>
             </a:extLst>
           </p:cNvPr>
@@ -12835,7 +12835,7 @@
           <p:cNvPr id="5" name="">
             <a:extLst xmlns:a="http://schemas.openxmlformats.org/drawingml/2006/main">
               <a:ext uri="{FF2B5EF4-FFF2-40B4-BE49-F238E27FC236}">
-                <a16:creationId xmlns:a16="http://schemas.microsoft.com/office/drawing/2014/main" id="{822BF5EB-B6C4-4656-8E32-683624B517C9}"/>
+                <a16:creationId xmlns:a16="http://schemas.microsoft.com/office/drawing/2014/main" id="{35B857D4-AA79-4D5C-AB4F-4EB577579E87}"/>
               </a:ext>
             </a:extLst>
           </p:cNvPr>
@@ -12893,7 +12893,7 @@
           <p:cNvPr id="6" name="">
             <a:extLst xmlns:a="http://schemas.openxmlformats.org/drawingml/2006/main">
               <a:ext uri="{FF2B5EF4-FFF2-40B4-BE49-F238E27FC236}">
-                <a16:creationId xmlns:a16="http://schemas.microsoft.com/office/drawing/2014/main" id="{F2F009FC-ED37-4475-B743-B1BA2FD8B967}"/>
+                <a16:creationId xmlns:a16="http://schemas.microsoft.com/office/drawing/2014/main" id="{F19BFE16-4D38-49BB-937D-F53B5B7E431D}"/>
               </a:ext>
             </a:extLst>
           </p:cNvPr>
@@ -12955,13 +12955,13 @@
           <p:nvPr/>
         </p:nvPicPr>
         <p:blipFill>
-          <a:blip xmlns:r="http://schemas.openxmlformats.org/officeDocument/2006/relationships" xmlns:a="http://schemas.openxmlformats.org/drawingml/2006/main" r:embed="Rfd88a3e601fb4b95"/>
+          <a:blip xmlns:r="http://schemas.openxmlformats.org/officeDocument/2006/relationships" xmlns:a="http://schemas.openxmlformats.org/drawingml/2006/main" r:embed="Rfcd535adc6d841bd"/>
           <a:stretch xmlns:a="http://schemas.openxmlformats.org/drawingml/2006/main"/>
         </p:blipFill>
         <p:spPr>
           <a:xfrm xmlns:a="http://schemas.openxmlformats.org/drawingml/2006/main">
-            <a:off x="476250" y="1257300"/>
-            <a:ext cx="2667000" cy="4533900"/>
+            <a:off x="0" y="1746250"/>
+            <a:ext cx="2667000" cy="3556000"/>
           </a:xfrm>
           <a:prstGeom xmlns:a="http://schemas.openxmlformats.org/drawingml/2006/main" prst="rect">
             <a:avLst/>
@@ -12973,7 +12973,7 @@
           <p:cNvPr id="8" name="">
             <a:extLst xmlns:a="http://schemas.openxmlformats.org/drawingml/2006/main">
               <a:ext uri="{FF2B5EF4-FFF2-40B4-BE49-F238E27FC236}">
-                <a16:creationId xmlns:a16="http://schemas.microsoft.com/office/drawing/2014/main" id="{1D1BB3F9-C823-4BBC-84F3-3892D0BAB25F}"/>
+                <a16:creationId xmlns:a16="http://schemas.microsoft.com/office/drawing/2014/main" id="{40AFA77A-572F-470F-ADC3-2F30E5F1F668}"/>
               </a:ext>
             </a:extLst>
           </p:cNvPr>
@@ -13031,7 +13031,7 @@
           <p:cNvPr id="9" name="">
             <a:extLst xmlns:a="http://schemas.openxmlformats.org/drawingml/2006/main">
               <a:ext uri="{FF2B5EF4-FFF2-40B4-BE49-F238E27FC236}">
-                <a16:creationId xmlns:a16="http://schemas.microsoft.com/office/drawing/2014/main" id="{6BEED6AA-92F9-4199-A431-3A01D5B71727}"/>
+                <a16:creationId xmlns:a16="http://schemas.microsoft.com/office/drawing/2014/main" id="{77090909-915B-4B1F-81FC-2CB2E9AC677D}"/>
               </a:ext>
             </a:extLst>
           </p:cNvPr>
@@ -13089,7 +13089,7 @@
           <p:cNvPr id="10" name="">
             <a:extLst xmlns:a="http://schemas.openxmlformats.org/drawingml/2006/main">
               <a:ext uri="{FF2B5EF4-FFF2-40B4-BE49-F238E27FC236}">
-                <a16:creationId xmlns:a16="http://schemas.microsoft.com/office/drawing/2014/main" id="{9456FBCA-E91B-4652-90D2-77FD5A21D996}"/>
+                <a16:creationId xmlns:a16="http://schemas.microsoft.com/office/drawing/2014/main" id="{725471DC-6AE2-4825-88B4-7EFAAC433B4A}"/>
               </a:ext>
             </a:extLst>
           </p:cNvPr>
@@ -13145,7 +13145,7 @@
     </p:spTree>
     <p:extLst>
       <p:ext uri="{BB962C8B-B14F-4D97-AF65-F5344CB8AC3E}">
-        <p14:creationId xmlns:p14="http://schemas.microsoft.com/office/powerpoint/2010/main" val="1472907043"/>
+        <p14:creationId xmlns:p14="http://schemas.microsoft.com/office/powerpoint/2010/main" val="1324667331"/>
       </p:ext>
     </p:extLst>
   </p:cSld>
@@ -13176,7 +13176,7 @@
           <p:cNvPr id="1" name="">
             <a:extLst xmlns:a="http://schemas.openxmlformats.org/drawingml/2006/main">
               <a:ext uri="{FF2B5EF4-FFF2-40B4-BE49-F238E27FC236}">
-                <a16:creationId xmlns:a16="http://schemas.microsoft.com/office/drawing/2014/main" id="{663974BB-6841-4675-BA27-ACC30490E0C1}"/>
+                <a16:creationId xmlns:a16="http://schemas.microsoft.com/office/drawing/2014/main" id="{FFF6DF0E-1A61-47BC-8D66-71B371B94A20}"/>
               </a:ext>
             </a:extLst>
           </p:cNvPr>
@@ -13215,7 +13215,7 @@
           <p:nvPr/>
         </p:nvPicPr>
         <p:blipFill>
-          <a:blip xmlns:r="http://schemas.openxmlformats.org/officeDocument/2006/relationships" xmlns:a="http://schemas.openxmlformats.org/drawingml/2006/main" r:embed="R6569915a84da4d1d"/>
+          <a:blip xmlns:r="http://schemas.openxmlformats.org/officeDocument/2006/relationships" xmlns:a="http://schemas.openxmlformats.org/drawingml/2006/main" r:embed="R240a8306887b49a2"/>
           <a:stretch xmlns:a="http://schemas.openxmlformats.org/drawingml/2006/main"/>
         </p:blipFill>
         <p:spPr>
@@ -13233,7 +13233,7 @@
           <p:cNvPr id="3" name="">
             <a:extLst xmlns:a="http://schemas.openxmlformats.org/drawingml/2006/main">
               <a:ext uri="{FF2B5EF4-FFF2-40B4-BE49-F238E27FC236}">
-                <a16:creationId xmlns:a16="http://schemas.microsoft.com/office/drawing/2014/main" id="{31F518E0-15F1-4E0F-B8C0-A231AD37B436}"/>
+                <a16:creationId xmlns:a16="http://schemas.microsoft.com/office/drawing/2014/main" id="{8094A4C5-4854-4440-84DC-9A7F787BDB39}"/>
               </a:ext>
             </a:extLst>
           </p:cNvPr>
@@ -13271,14 +13271,14 @@
             <a:pPr algn="r">
               <a:defRPr sz="825" b="1">
                 <a:solidFill>
-                  <a:srgbClr val="0E1B3E"/>
+                  <a:srgbClr val="070F26"/>
                 </a:solidFill>
               </a:defRPr>
             </a:pPr>
             <a:r>
               <a:rPr sz="825" b="1">
                 <a:solidFill>
-                  <a:srgbClr val="0E1B3E"/>
+                  <a:srgbClr val="070F26"/>
                 </a:solidFill>
               </a:rPr>
               <a:t>NTT DATA UNIVERSITY</a:t>
@@ -13291,7 +13291,7 @@
           <p:cNvPr id="4" name="">
             <a:extLst xmlns:a="http://schemas.openxmlformats.org/drawingml/2006/main">
               <a:ext uri="{FF2B5EF4-FFF2-40B4-BE49-F238E27FC236}">
-                <a16:creationId xmlns:a16="http://schemas.microsoft.com/office/drawing/2014/main" id="{5BE6B248-3CE7-4D3B-AF96-907FB9DBCCE1}"/>
+                <a16:creationId xmlns:a16="http://schemas.microsoft.com/office/drawing/2014/main" id="{C929CFE4-8943-42AF-BB7B-C889F10671A3}"/>
               </a:ext>
             </a:extLst>
           </p:cNvPr>
@@ -13349,7 +13349,7 @@
           <p:cNvPr id="5" name="">
             <a:extLst xmlns:a="http://schemas.openxmlformats.org/drawingml/2006/main">
               <a:ext uri="{FF2B5EF4-FFF2-40B4-BE49-F238E27FC236}">
-                <a16:creationId xmlns:a16="http://schemas.microsoft.com/office/drawing/2014/main" id="{E825701E-75A5-4085-8A1C-C104595DB329}"/>
+                <a16:creationId xmlns:a16="http://schemas.microsoft.com/office/drawing/2014/main" id="{FAFB690B-FABE-4DE5-A820-3C53B40F9550}"/>
               </a:ext>
             </a:extLst>
           </p:cNvPr>
@@ -13407,7 +13407,7 @@
           <p:cNvPr id="6" name="">
             <a:extLst xmlns:a="http://schemas.openxmlformats.org/drawingml/2006/main">
               <a:ext uri="{FF2B5EF4-FFF2-40B4-BE49-F238E27FC236}">
-                <a16:creationId xmlns:a16="http://schemas.microsoft.com/office/drawing/2014/main" id="{B5F6B547-9804-47BC-95C3-EDC346543915}"/>
+                <a16:creationId xmlns:a16="http://schemas.microsoft.com/office/drawing/2014/main" id="{5245FF43-BD0F-4CFA-A7A6-57B35EB3F16E}"/>
               </a:ext>
             </a:extLst>
           </p:cNvPr>
@@ -13445,14 +13445,14 @@
             <a:pPr algn="r">
               <a:defRPr sz="675" b="1">
                 <a:solidFill>
-                  <a:srgbClr val="0E1B3E"/>
+                  <a:srgbClr val="070F26"/>
                 </a:solidFill>
               </a:defRPr>
             </a:pPr>
             <a:r>
               <a:rPr sz="675" b="1">
                 <a:solidFill>
-                  <a:srgbClr val="0E1B3E"/>
+                  <a:srgbClr val="070F26"/>
                 </a:solidFill>
               </a:rPr>
               <a:t>NTT DATA UNIVERSITY</a:t>
@@ -13465,7 +13465,7 @@
           <p:cNvPr id="7" name="">
             <a:extLst xmlns:a="http://schemas.openxmlformats.org/drawingml/2006/main">
               <a:ext uri="{FF2B5EF4-FFF2-40B4-BE49-F238E27FC236}">
-                <a16:creationId xmlns:a16="http://schemas.microsoft.com/office/drawing/2014/main" id="{92CF8F76-E718-4152-B31D-96E859D9ED8D}"/>
+                <a16:creationId xmlns:a16="http://schemas.microsoft.com/office/drawing/2014/main" id="{126CC8D5-5A59-4C0C-BF4D-4AC5014D76B0}"/>
               </a:ext>
             </a:extLst>
           </p:cNvPr>
@@ -13523,7 +13523,7 @@
           <p:cNvPr id="8" name="">
             <a:extLst xmlns:a="http://schemas.openxmlformats.org/drawingml/2006/main">
               <a:ext uri="{FF2B5EF4-FFF2-40B4-BE49-F238E27FC236}">
-                <a16:creationId xmlns:a16="http://schemas.microsoft.com/office/drawing/2014/main" id="{75BDC698-D46F-459F-81DF-C42B84E8A7F3}"/>
+                <a16:creationId xmlns:a16="http://schemas.microsoft.com/office/drawing/2014/main" id="{DDB9759D-9081-4CCA-B4E6-EEA47B151195}"/>
               </a:ext>
             </a:extLst>
           </p:cNvPr>
@@ -13561,14 +13561,14 @@
             <a:pPr algn="l">
               <a:defRPr sz="2400" b="0">
                 <a:solidFill>
-                  <a:srgbClr val="0E1B3E"/>
+                  <a:srgbClr val="070F26"/>
                 </a:solidFill>
               </a:defRPr>
             </a:pPr>
             <a:r>
               <a:rPr sz="2400" b="0">
                 <a:solidFill>
-                  <a:srgbClr val="0E1B3E"/>
+                  <a:srgbClr val="070F26"/>
                 </a:solidFill>
               </a:rPr>
               <a:t>Três partes progressivas em grupos</a:t>
@@ -13581,7 +13581,7 @@
           <p:cNvPr id="9" name="">
             <a:extLst xmlns:a="http://schemas.openxmlformats.org/drawingml/2006/main">
               <a:ext uri="{FF2B5EF4-FFF2-40B4-BE49-F238E27FC236}">
-                <a16:creationId xmlns:a16="http://schemas.microsoft.com/office/drawing/2014/main" id="{538F258F-B004-448F-96A2-B5562CEC24C0}"/>
+                <a16:creationId xmlns:a16="http://schemas.microsoft.com/office/drawing/2014/main" id="{C3090BFA-AAA3-413A-AFEC-02F048460DF9}"/>
               </a:ext>
             </a:extLst>
           </p:cNvPr>
@@ -13639,7 +13639,7 @@
           <p:cNvPr id="10" name="">
             <a:extLst xmlns:a="http://schemas.openxmlformats.org/drawingml/2006/main">
               <a:ext uri="{FF2B5EF4-FFF2-40B4-BE49-F238E27FC236}">
-                <a16:creationId xmlns:a16="http://schemas.microsoft.com/office/drawing/2014/main" id="{D11E535A-BD1D-474B-A5E0-FE07651882AD}"/>
+                <a16:creationId xmlns:a16="http://schemas.microsoft.com/office/drawing/2014/main" id="{41287FF5-CAEC-490A-9316-B1AE4BFD2EBB}"/>
               </a:ext>
             </a:extLst>
           </p:cNvPr>
@@ -13672,7 +13672,7 @@
           <p:cNvPr id="11" name="">
             <a:extLst xmlns:a="http://schemas.openxmlformats.org/drawingml/2006/main">
               <a:ext uri="{FF2B5EF4-FFF2-40B4-BE49-F238E27FC236}">
-                <a16:creationId xmlns:a16="http://schemas.microsoft.com/office/drawing/2014/main" id="{21132A85-F8BB-490B-B43E-764598962076}"/>
+                <a16:creationId xmlns:a16="http://schemas.microsoft.com/office/drawing/2014/main" id="{5B1061E3-35B5-41D3-A2D3-27B67CBD1C9F}"/>
               </a:ext>
             </a:extLst>
           </p:cNvPr>
@@ -13707,7 +13707,7 @@
           <p:cNvPr id="12" name="">
             <a:extLst xmlns:a="http://schemas.openxmlformats.org/drawingml/2006/main">
               <a:ext uri="{FF2B5EF4-FFF2-40B4-BE49-F238E27FC236}">
-                <a16:creationId xmlns:a16="http://schemas.microsoft.com/office/drawing/2014/main" id="{15CB54D7-9D4B-43F7-BADF-213710C4B4A0}"/>
+                <a16:creationId xmlns:a16="http://schemas.microsoft.com/office/drawing/2014/main" id="{AAFB5237-4737-4A31-95F7-1A21897384E3}"/>
               </a:ext>
             </a:extLst>
           </p:cNvPr>
@@ -13765,7 +13765,7 @@
           <p:cNvPr id="13" name="">
             <a:extLst xmlns:a="http://schemas.openxmlformats.org/drawingml/2006/main">
               <a:ext uri="{FF2B5EF4-FFF2-40B4-BE49-F238E27FC236}">
-                <a16:creationId xmlns:a16="http://schemas.microsoft.com/office/drawing/2014/main" id="{8A9899EE-9771-487D-BC00-723D5283FB27}"/>
+                <a16:creationId xmlns:a16="http://schemas.microsoft.com/office/drawing/2014/main" id="{372D221F-1687-4324-81D9-8FC3FA5D150C}"/>
               </a:ext>
             </a:extLst>
           </p:cNvPr>
@@ -13803,14 +13803,14 @@
             <a:pPr algn="l">
               <a:defRPr sz="1050" b="1">
                 <a:solidFill>
-                  <a:srgbClr val="0E1B3E"/>
+                  <a:srgbClr val="070F26"/>
                 </a:solidFill>
               </a:defRPr>
             </a:pPr>
             <a:r>
               <a:rPr sz="1050" b="1">
                 <a:solidFill>
-                  <a:srgbClr val="0E1B3E"/>
+                  <a:srgbClr val="070F26"/>
                 </a:solidFill>
               </a:rPr>
               <a:t>3A — Básico (20 min)</a:t>
@@ -13823,7 +13823,7 @@
           <p:cNvPr id="14" name="">
             <a:extLst xmlns:a="http://schemas.openxmlformats.org/drawingml/2006/main">
               <a:ext uri="{FF2B5EF4-FFF2-40B4-BE49-F238E27FC236}">
-                <a16:creationId xmlns:a16="http://schemas.microsoft.com/office/drawing/2014/main" id="{AEFDAD55-DCBC-4656-80E0-79976CC087B6}"/>
+                <a16:creationId xmlns:a16="http://schemas.microsoft.com/office/drawing/2014/main" id="{72F74F04-BDF0-4C78-98EB-DEE70B2A532C}"/>
               </a:ext>
             </a:extLst>
           </p:cNvPr>
@@ -13915,7 +13915,7 @@
           <p:cNvPr id="15" name="">
             <a:extLst xmlns:a="http://schemas.openxmlformats.org/drawingml/2006/main">
               <a:ext uri="{FF2B5EF4-FFF2-40B4-BE49-F238E27FC236}">
-                <a16:creationId xmlns:a16="http://schemas.microsoft.com/office/drawing/2014/main" id="{B06A2C25-5132-4334-874E-CB395A7B4EFB}"/>
+                <a16:creationId xmlns:a16="http://schemas.microsoft.com/office/drawing/2014/main" id="{C8CA0FC7-B871-433D-B327-317FCB9C9CB1}"/>
               </a:ext>
             </a:extLst>
           </p:cNvPr>
@@ -13948,7 +13948,7 @@
           <p:cNvPr id="16" name="">
             <a:extLst xmlns:a="http://schemas.openxmlformats.org/drawingml/2006/main">
               <a:ext uri="{FF2B5EF4-FFF2-40B4-BE49-F238E27FC236}">
-                <a16:creationId xmlns:a16="http://schemas.microsoft.com/office/drawing/2014/main" id="{9760D032-BA69-41B3-9180-4D51DCACBC58}"/>
+                <a16:creationId xmlns:a16="http://schemas.microsoft.com/office/drawing/2014/main" id="{828C3185-0AC3-4F05-BA31-729CD231278B}"/>
               </a:ext>
             </a:extLst>
           </p:cNvPr>
@@ -13983,7 +13983,7 @@
           <p:cNvPr id="17" name="">
             <a:extLst xmlns:a="http://schemas.openxmlformats.org/drawingml/2006/main">
               <a:ext uri="{FF2B5EF4-FFF2-40B4-BE49-F238E27FC236}">
-                <a16:creationId xmlns:a16="http://schemas.microsoft.com/office/drawing/2014/main" id="{1476D0A8-AF72-4510-888B-49DA0440969F}"/>
+                <a16:creationId xmlns:a16="http://schemas.microsoft.com/office/drawing/2014/main" id="{E8B071AF-0F01-44D0-990A-DE6670893882}"/>
               </a:ext>
             </a:extLst>
           </p:cNvPr>
@@ -14041,7 +14041,7 @@
           <p:cNvPr id="18" name="">
             <a:extLst xmlns:a="http://schemas.openxmlformats.org/drawingml/2006/main">
               <a:ext uri="{FF2B5EF4-FFF2-40B4-BE49-F238E27FC236}">
-                <a16:creationId xmlns:a16="http://schemas.microsoft.com/office/drawing/2014/main" id="{45579327-40D6-4CEF-BDC2-FB92B72DD9AF}"/>
+                <a16:creationId xmlns:a16="http://schemas.microsoft.com/office/drawing/2014/main" id="{75435E35-BFE4-4D18-9F22-21BC1F614274}"/>
               </a:ext>
             </a:extLst>
           </p:cNvPr>
@@ -14079,14 +14079,14 @@
             <a:pPr algn="l">
               <a:defRPr sz="1050" b="1">
                 <a:solidFill>
-                  <a:srgbClr val="0E1B3E"/>
+                  <a:srgbClr val="070F26"/>
                 </a:solidFill>
               </a:defRPr>
             </a:pPr>
             <a:r>
               <a:rPr sz="1050" b="1">
                 <a:solidFill>
-                  <a:srgbClr val="0E1B3E"/>
+                  <a:srgbClr val="070F26"/>
                 </a:solidFill>
               </a:rPr>
               <a:t>3B — Logging (20 min)</a:t>
@@ -14099,7 +14099,7 @@
           <p:cNvPr id="19" name="">
             <a:extLst xmlns:a="http://schemas.openxmlformats.org/drawingml/2006/main">
               <a:ext uri="{FF2B5EF4-FFF2-40B4-BE49-F238E27FC236}">
-                <a16:creationId xmlns:a16="http://schemas.microsoft.com/office/drawing/2014/main" id="{402E1E8D-0D49-4EA5-82FE-B7C43EF9BC04}"/>
+                <a16:creationId xmlns:a16="http://schemas.microsoft.com/office/drawing/2014/main" id="{BCD36E89-98C0-4620-BB8D-047A2AB928ED}"/>
               </a:ext>
             </a:extLst>
           </p:cNvPr>
@@ -14191,7 +14191,7 @@
           <p:cNvPr id="20" name="">
             <a:extLst xmlns:a="http://schemas.openxmlformats.org/drawingml/2006/main">
               <a:ext uri="{FF2B5EF4-FFF2-40B4-BE49-F238E27FC236}">
-                <a16:creationId xmlns:a16="http://schemas.microsoft.com/office/drawing/2014/main" id="{3575946C-667E-4419-B676-B27B7BB86A09}"/>
+                <a16:creationId xmlns:a16="http://schemas.microsoft.com/office/drawing/2014/main" id="{24DBCB8A-09F8-4AA6-BC79-7085E6BEBDB3}"/>
               </a:ext>
             </a:extLst>
           </p:cNvPr>
@@ -14224,7 +14224,7 @@
           <p:cNvPr id="21" name="">
             <a:extLst xmlns:a="http://schemas.openxmlformats.org/drawingml/2006/main">
               <a:ext uri="{FF2B5EF4-FFF2-40B4-BE49-F238E27FC236}">
-                <a16:creationId xmlns:a16="http://schemas.microsoft.com/office/drawing/2014/main" id="{DEF9F9BF-7814-45A2-842A-68AE74983556}"/>
+                <a16:creationId xmlns:a16="http://schemas.microsoft.com/office/drawing/2014/main" id="{ADEEBC1D-E356-4DA7-A1F7-3137557C8449}"/>
               </a:ext>
             </a:extLst>
           </p:cNvPr>
@@ -14259,7 +14259,7 @@
           <p:cNvPr id="22" name="">
             <a:extLst xmlns:a="http://schemas.openxmlformats.org/drawingml/2006/main">
               <a:ext uri="{FF2B5EF4-FFF2-40B4-BE49-F238E27FC236}">
-                <a16:creationId xmlns:a16="http://schemas.microsoft.com/office/drawing/2014/main" id="{B5089BFF-D1C4-46E3-B53C-1C2CCDF3DCE6}"/>
+                <a16:creationId xmlns:a16="http://schemas.microsoft.com/office/drawing/2014/main" id="{BCC09C0B-FC1D-4A13-BC3E-83555431672E}"/>
               </a:ext>
             </a:extLst>
           </p:cNvPr>
@@ -14317,7 +14317,7 @@
           <p:cNvPr id="23" name="">
             <a:extLst xmlns:a="http://schemas.openxmlformats.org/drawingml/2006/main">
               <a:ext uri="{FF2B5EF4-FFF2-40B4-BE49-F238E27FC236}">
-                <a16:creationId xmlns:a16="http://schemas.microsoft.com/office/drawing/2014/main" id="{73CC087E-5C6F-40C7-B5A5-B30CF27295FC}"/>
+                <a16:creationId xmlns:a16="http://schemas.microsoft.com/office/drawing/2014/main" id="{1784B521-6824-4C56-B956-1BCBE9DCBC1F}"/>
               </a:ext>
             </a:extLst>
           </p:cNvPr>
@@ -14355,14 +14355,14 @@
             <a:pPr algn="l">
               <a:defRPr sz="1050" b="1">
                 <a:solidFill>
-                  <a:srgbClr val="0E1B3E"/>
+                  <a:srgbClr val="070F26"/>
                 </a:solidFill>
               </a:defRPr>
             </a:pPr>
             <a:r>
               <a:rPr sz="1050" b="1">
                 <a:solidFill>
-                  <a:srgbClr val="0E1B3E"/>
+                  <a:srgbClr val="070F26"/>
                 </a:solidFill>
               </a:rPr>
               <a:t>3C — Falha (30 min)</a:t>
@@ -14375,7 +14375,7 @@
           <p:cNvPr id="24" name="">
             <a:extLst xmlns:a="http://schemas.openxmlformats.org/drawingml/2006/main">
               <a:ext uri="{FF2B5EF4-FFF2-40B4-BE49-F238E27FC236}">
-                <a16:creationId xmlns:a16="http://schemas.microsoft.com/office/drawing/2014/main" id="{AE18BC15-B92E-4B97-87AF-2249C9A46EC2}"/>
+                <a16:creationId xmlns:a16="http://schemas.microsoft.com/office/drawing/2014/main" id="{A7B44AB6-583F-45A8-8407-2D374D1E0EA6}"/>
               </a:ext>
             </a:extLst>
           </p:cNvPr>
@@ -14465,7 +14465,7 @@
     </p:spTree>
     <p:extLst>
       <p:ext uri="{BB962C8B-B14F-4D97-AF65-F5344CB8AC3E}">
-        <p14:creationId xmlns:p14="http://schemas.microsoft.com/office/powerpoint/2010/main" val="1820119219"/>
+        <p14:creationId xmlns:p14="http://schemas.microsoft.com/office/powerpoint/2010/main" val="1484112941"/>
       </p:ext>
     </p:extLst>
   </p:cSld>
@@ -14496,7 +14496,7 @@
           <p:cNvPr id="1" name="">
             <a:extLst xmlns:a="http://schemas.openxmlformats.org/drawingml/2006/main">
               <a:ext uri="{FF2B5EF4-FFF2-40B4-BE49-F238E27FC236}">
-                <a16:creationId xmlns:a16="http://schemas.microsoft.com/office/drawing/2014/main" id="{23E70986-4D47-48B5-A01A-C98371F6B8EF}"/>
+                <a16:creationId xmlns:a16="http://schemas.microsoft.com/office/drawing/2014/main" id="{D59B0702-60A6-431D-A365-1F499143023B}"/>
               </a:ext>
             </a:extLst>
           </p:cNvPr>
@@ -14535,7 +14535,7 @@
           <p:nvPr/>
         </p:nvPicPr>
         <p:blipFill>
-          <a:blip xmlns:r="http://schemas.openxmlformats.org/officeDocument/2006/relationships" xmlns:a="http://schemas.openxmlformats.org/drawingml/2006/main" r:embed="Rddbe57145e084686"/>
+          <a:blip xmlns:r="http://schemas.openxmlformats.org/officeDocument/2006/relationships" xmlns:a="http://schemas.openxmlformats.org/drawingml/2006/main" r:embed="R65a681d905164913"/>
           <a:stretch xmlns:a="http://schemas.openxmlformats.org/drawingml/2006/main"/>
         </p:blipFill>
         <p:spPr>
@@ -14553,7 +14553,7 @@
           <p:cNvPr id="3" name="">
             <a:extLst xmlns:a="http://schemas.openxmlformats.org/drawingml/2006/main">
               <a:ext uri="{FF2B5EF4-FFF2-40B4-BE49-F238E27FC236}">
-                <a16:creationId xmlns:a16="http://schemas.microsoft.com/office/drawing/2014/main" id="{94CED0D8-0F9B-4EF0-9155-EBBE0E5DED09}"/>
+                <a16:creationId xmlns:a16="http://schemas.microsoft.com/office/drawing/2014/main" id="{D9ABEC77-1649-463D-AAE8-F1361506E76A}"/>
               </a:ext>
             </a:extLst>
           </p:cNvPr>
@@ -14591,14 +14591,14 @@
             <a:pPr algn="r">
               <a:defRPr sz="825" b="1">
                 <a:solidFill>
-                  <a:srgbClr val="0E1B3E"/>
+                  <a:srgbClr val="070F26"/>
                 </a:solidFill>
               </a:defRPr>
             </a:pPr>
             <a:r>
               <a:rPr sz="825" b="1">
                 <a:solidFill>
-                  <a:srgbClr val="0E1B3E"/>
+                  <a:srgbClr val="070F26"/>
                 </a:solidFill>
               </a:rPr>
               <a:t>NTT DATA UNIVERSITY</a:t>
@@ -14611,7 +14611,7 @@
           <p:cNvPr id="4" name="">
             <a:extLst xmlns:a="http://schemas.openxmlformats.org/drawingml/2006/main">
               <a:ext uri="{FF2B5EF4-FFF2-40B4-BE49-F238E27FC236}">
-                <a16:creationId xmlns:a16="http://schemas.microsoft.com/office/drawing/2014/main" id="{6A1E27F3-37FA-406B-B810-94D7D9E86A24}"/>
+                <a16:creationId xmlns:a16="http://schemas.microsoft.com/office/drawing/2014/main" id="{5EFDC25A-F769-4B10-A213-01E775BFC9B3}"/>
               </a:ext>
             </a:extLst>
           </p:cNvPr>
@@ -14669,7 +14669,7 @@
           <p:cNvPr id="5" name="">
             <a:extLst xmlns:a="http://schemas.openxmlformats.org/drawingml/2006/main">
               <a:ext uri="{FF2B5EF4-FFF2-40B4-BE49-F238E27FC236}">
-                <a16:creationId xmlns:a16="http://schemas.microsoft.com/office/drawing/2014/main" id="{CA79EC68-24FA-4D7E-87E0-47F948395175}"/>
+                <a16:creationId xmlns:a16="http://schemas.microsoft.com/office/drawing/2014/main" id="{5DBF826D-A5D6-4694-911B-82F1DB5DBCF0}"/>
               </a:ext>
             </a:extLst>
           </p:cNvPr>
@@ -14727,7 +14727,7 @@
           <p:cNvPr id="6" name="">
             <a:extLst xmlns:a="http://schemas.openxmlformats.org/drawingml/2006/main">
               <a:ext uri="{FF2B5EF4-FFF2-40B4-BE49-F238E27FC236}">
-                <a16:creationId xmlns:a16="http://schemas.microsoft.com/office/drawing/2014/main" id="{47D5B0D3-C145-4B67-AB5C-EEA452D04E3A}"/>
+                <a16:creationId xmlns:a16="http://schemas.microsoft.com/office/drawing/2014/main" id="{2F75BE51-5C57-4EC7-96CC-65B41F8C60E9}"/>
               </a:ext>
             </a:extLst>
           </p:cNvPr>
@@ -14765,14 +14765,14 @@
             <a:pPr algn="r">
               <a:defRPr sz="675" b="1">
                 <a:solidFill>
-                  <a:srgbClr val="0E1B3E"/>
+                  <a:srgbClr val="070F26"/>
                 </a:solidFill>
               </a:defRPr>
             </a:pPr>
             <a:r>
               <a:rPr sz="675" b="1">
                 <a:solidFill>
-                  <a:srgbClr val="0E1B3E"/>
+                  <a:srgbClr val="070F26"/>
                 </a:solidFill>
               </a:rPr>
               <a:t>NTT DATA UNIVERSITY</a:t>
@@ -14785,7 +14785,7 @@
           <p:cNvPr id="7" name="">
             <a:extLst xmlns:a="http://schemas.openxmlformats.org/drawingml/2006/main">
               <a:ext uri="{FF2B5EF4-FFF2-40B4-BE49-F238E27FC236}">
-                <a16:creationId xmlns:a16="http://schemas.microsoft.com/office/drawing/2014/main" id="{BAAD0EF2-09F0-4E2E-8899-0C362E5D5BE9}"/>
+                <a16:creationId xmlns:a16="http://schemas.microsoft.com/office/drawing/2014/main" id="{CB19F364-B202-4A2B-BD9C-5D10315186BE}"/>
               </a:ext>
             </a:extLst>
           </p:cNvPr>
@@ -14843,7 +14843,7 @@
           <p:cNvPr id="8" name="">
             <a:extLst xmlns:a="http://schemas.openxmlformats.org/drawingml/2006/main">
               <a:ext uri="{FF2B5EF4-FFF2-40B4-BE49-F238E27FC236}">
-                <a16:creationId xmlns:a16="http://schemas.microsoft.com/office/drawing/2014/main" id="{90B93747-7A28-45EE-8234-38EB5617E863}"/>
+                <a16:creationId xmlns:a16="http://schemas.microsoft.com/office/drawing/2014/main" id="{4AE44242-D763-4A35-B531-C962C0A8FB10}"/>
               </a:ext>
             </a:extLst>
           </p:cNvPr>
@@ -14881,14 +14881,14 @@
             <a:pPr algn="l">
               <a:defRPr sz="2400" b="0">
                 <a:solidFill>
-                  <a:srgbClr val="0E1B3E"/>
+                  <a:srgbClr val="070F26"/>
                 </a:solidFill>
               </a:defRPr>
             </a:pPr>
             <a:r>
               <a:rPr sz="2400" b="0">
                 <a:solidFill>
-                  <a:srgbClr val="0E1B3E"/>
+                  <a:srgbClr val="070F26"/>
                 </a:solidFill>
               </a:rPr>
               <a:t>Falha silenciosa é pior que falha com erro</a:t>
@@ -14901,7 +14901,7 @@
           <p:cNvPr id="9" name="">
             <a:extLst xmlns:a="http://schemas.openxmlformats.org/drawingml/2006/main">
               <a:ext uri="{FF2B5EF4-FFF2-40B4-BE49-F238E27FC236}">
-                <a16:creationId xmlns:a16="http://schemas.microsoft.com/office/drawing/2014/main" id="{5104B121-77B4-4365-9D87-5D57064367E7}"/>
+                <a16:creationId xmlns:a16="http://schemas.microsoft.com/office/drawing/2014/main" id="{C07D7B8B-A75F-404F-A12A-668D9792EEA0}"/>
               </a:ext>
             </a:extLst>
           </p:cNvPr>
@@ -14959,7 +14959,7 @@
           <p:cNvPr id="10" name="">
             <a:extLst xmlns:a="http://schemas.openxmlformats.org/drawingml/2006/main">
               <a:ext uri="{FF2B5EF4-FFF2-40B4-BE49-F238E27FC236}">
-                <a16:creationId xmlns:a16="http://schemas.microsoft.com/office/drawing/2014/main" id="{6548AAEA-5CFE-4552-B820-BBE20B1ECAB9}"/>
+                <a16:creationId xmlns:a16="http://schemas.microsoft.com/office/drawing/2014/main" id="{DB7286F9-3110-4523-A0D3-BD33436BBC5C}"/>
               </a:ext>
             </a:extLst>
           </p:cNvPr>
@@ -14992,7 +14992,7 @@
           <p:cNvPr id="11" name="">
             <a:extLst xmlns:a="http://schemas.openxmlformats.org/drawingml/2006/main">
               <a:ext uri="{FF2B5EF4-FFF2-40B4-BE49-F238E27FC236}">
-                <a16:creationId xmlns:a16="http://schemas.microsoft.com/office/drawing/2014/main" id="{89998E1B-F12A-41E1-B891-6367DCD70F3C}"/>
+                <a16:creationId xmlns:a16="http://schemas.microsoft.com/office/drawing/2014/main" id="{BB635652-FEB6-4BAD-946C-C4A691CE502F}"/>
               </a:ext>
             </a:extLst>
           </p:cNvPr>
@@ -15027,7 +15027,7 @@
           <p:cNvPr id="12" name="">
             <a:extLst xmlns:a="http://schemas.openxmlformats.org/drawingml/2006/main">
               <a:ext uri="{FF2B5EF4-FFF2-40B4-BE49-F238E27FC236}">
-                <a16:creationId xmlns:a16="http://schemas.microsoft.com/office/drawing/2014/main" id="{9FFC3509-40C5-4EB4-A816-580C346C06B7}"/>
+                <a16:creationId xmlns:a16="http://schemas.microsoft.com/office/drawing/2014/main" id="{F217B24E-17D4-4183-AC3C-BAE612320D50}"/>
               </a:ext>
             </a:extLst>
           </p:cNvPr>
@@ -15085,7 +15085,7 @@
           <p:cNvPr id="13" name="">
             <a:extLst xmlns:a="http://schemas.openxmlformats.org/drawingml/2006/main">
               <a:ext uri="{FF2B5EF4-FFF2-40B4-BE49-F238E27FC236}">
-                <a16:creationId xmlns:a16="http://schemas.microsoft.com/office/drawing/2014/main" id="{19735AFE-7305-490D-90EC-AAC3DCBC5A41}"/>
+                <a16:creationId xmlns:a16="http://schemas.microsoft.com/office/drawing/2014/main" id="{9605C1B3-2869-4E12-9709-980C01FAF113}"/>
               </a:ext>
             </a:extLst>
           </p:cNvPr>
@@ -15296,7 +15296,7 @@
           <p:cNvPr id="14" name="">
             <a:extLst xmlns:a="http://schemas.openxmlformats.org/drawingml/2006/main">
               <a:ext uri="{FF2B5EF4-FFF2-40B4-BE49-F238E27FC236}">
-                <a16:creationId xmlns:a16="http://schemas.microsoft.com/office/drawing/2014/main" id="{A92974EC-9F71-4CF5-AF99-3460A1F11050}"/>
+                <a16:creationId xmlns:a16="http://schemas.microsoft.com/office/drawing/2014/main" id="{BE189CA1-A04B-40B5-A606-E43A7C78B3AA}"/>
               </a:ext>
             </a:extLst>
           </p:cNvPr>
@@ -15329,7 +15329,7 @@
           <p:cNvPr id="15" name="">
             <a:extLst xmlns:a="http://schemas.openxmlformats.org/drawingml/2006/main">
               <a:ext uri="{FF2B5EF4-FFF2-40B4-BE49-F238E27FC236}">
-                <a16:creationId xmlns:a16="http://schemas.microsoft.com/office/drawing/2014/main" id="{35ABCE47-42D3-4051-BC33-D9D996352A31}"/>
+                <a16:creationId xmlns:a16="http://schemas.microsoft.com/office/drawing/2014/main" id="{762C3C11-BD10-4B6E-9665-AF3F392CF650}"/>
               </a:ext>
             </a:extLst>
           </p:cNvPr>
@@ -15364,7 +15364,7 @@
           <p:cNvPr id="16" name="">
             <a:extLst xmlns:a="http://schemas.openxmlformats.org/drawingml/2006/main">
               <a:ext uri="{FF2B5EF4-FFF2-40B4-BE49-F238E27FC236}">
-                <a16:creationId xmlns:a16="http://schemas.microsoft.com/office/drawing/2014/main" id="{BF063427-5708-4702-93F9-4782AB25F1AF}"/>
+                <a16:creationId xmlns:a16="http://schemas.microsoft.com/office/drawing/2014/main" id="{68735B32-0F08-4F34-A5B1-9622920B3F48}"/>
               </a:ext>
             </a:extLst>
           </p:cNvPr>
@@ -15422,7 +15422,7 @@
           <p:cNvPr id="17" name="">
             <a:extLst xmlns:a="http://schemas.openxmlformats.org/drawingml/2006/main">
               <a:ext uri="{FF2B5EF4-FFF2-40B4-BE49-F238E27FC236}">
-                <a16:creationId xmlns:a16="http://schemas.microsoft.com/office/drawing/2014/main" id="{B961ACD4-91CE-4479-934C-33A06B9ABA8B}"/>
+                <a16:creationId xmlns:a16="http://schemas.microsoft.com/office/drawing/2014/main" id="{DD157D9B-384E-45A0-8FA7-AC0186F98CC6}"/>
               </a:ext>
             </a:extLst>
           </p:cNvPr>
@@ -15619,7 +15619,7 @@
     </p:spTree>
     <p:extLst>
       <p:ext uri="{BB962C8B-B14F-4D97-AF65-F5344CB8AC3E}">
-        <p14:creationId xmlns:p14="http://schemas.microsoft.com/office/powerpoint/2010/main" val="1044187146"/>
+        <p14:creationId xmlns:p14="http://schemas.microsoft.com/office/powerpoint/2010/main" val="2058318039"/>
       </p:ext>
     </p:extLst>
   </p:cSld>
